--- a/Colocar atividades aleatorias/Apresentação1 (1).pptx
+++ b/Colocar atividades aleatorias/Apresentação1 (1).pptx
@@ -840,7 +840,7 @@
           <a:p>
             <a:fld id="{FEFD702A-A8EF-457F-BAD4-84D51B465407}" type="datetimeFigureOut">
               <a:rPr lang="pt-BR" smtClean="0"/>
-              <a:t>28/05/2026</a:t>
+              <a:t>11/06/2026</a:t>
             </a:fld>
             <a:endParaRPr lang="pt-BR"/>
           </a:p>
@@ -1091,7 +1091,7 @@
           <a:p>
             <a:fld id="{FEFD702A-A8EF-457F-BAD4-84D51B465407}" type="datetimeFigureOut">
               <a:rPr lang="pt-BR" smtClean="0"/>
-              <a:t>28/05/2026</a:t>
+              <a:t>11/06/2026</a:t>
             </a:fld>
             <a:endParaRPr lang="pt-BR"/>
           </a:p>
@@ -1405,7 +1405,7 @@
           <a:p>
             <a:fld id="{FEFD702A-A8EF-457F-BAD4-84D51B465407}" type="datetimeFigureOut">
               <a:rPr lang="pt-BR" smtClean="0"/>
-              <a:t>28/05/2026</a:t>
+              <a:t>11/06/2026</a:t>
             </a:fld>
             <a:endParaRPr lang="pt-BR"/>
           </a:p>
@@ -1746,7 +1746,7 @@
           <a:p>
             <a:fld id="{FEFD702A-A8EF-457F-BAD4-84D51B465407}" type="datetimeFigureOut">
               <a:rPr lang="pt-BR" smtClean="0"/>
-              <a:t>28/05/2026</a:t>
+              <a:t>11/06/2026</a:t>
             </a:fld>
             <a:endParaRPr lang="pt-BR"/>
           </a:p>
@@ -2060,7 +2060,7 @@
           <a:p>
             <a:fld id="{FEFD702A-A8EF-457F-BAD4-84D51B465407}" type="datetimeFigureOut">
               <a:rPr lang="pt-BR" smtClean="0"/>
-              <a:t>28/05/2026</a:t>
+              <a:t>11/06/2026</a:t>
             </a:fld>
             <a:endParaRPr lang="pt-BR"/>
           </a:p>
@@ -2453,7 +2453,7 @@
           <a:p>
             <a:fld id="{FEFD702A-A8EF-457F-BAD4-84D51B465407}" type="datetimeFigureOut">
               <a:rPr lang="pt-BR" smtClean="0"/>
-              <a:t>28/05/2026</a:t>
+              <a:t>11/06/2026</a:t>
             </a:fld>
             <a:endParaRPr lang="pt-BR"/>
           </a:p>
@@ -2623,7 +2623,7 @@
           <a:p>
             <a:fld id="{FEFD702A-A8EF-457F-BAD4-84D51B465407}" type="datetimeFigureOut">
               <a:rPr lang="pt-BR" smtClean="0"/>
-              <a:t>28/05/2026</a:t>
+              <a:t>11/06/2026</a:t>
             </a:fld>
             <a:endParaRPr lang="pt-BR"/>
           </a:p>
@@ -2803,7 +2803,7 @@
           <a:p>
             <a:fld id="{FEFD702A-A8EF-457F-BAD4-84D51B465407}" type="datetimeFigureOut">
               <a:rPr lang="pt-BR" smtClean="0"/>
-              <a:t>28/05/2026</a:t>
+              <a:t>11/06/2026</a:t>
             </a:fld>
             <a:endParaRPr lang="pt-BR"/>
           </a:p>
@@ -2979,7 +2979,7 @@
           <a:p>
             <a:fld id="{FEFD702A-A8EF-457F-BAD4-84D51B465407}" type="datetimeFigureOut">
               <a:rPr lang="pt-BR" smtClean="0"/>
-              <a:t>28/05/2026</a:t>
+              <a:t>11/06/2026</a:t>
             </a:fld>
             <a:endParaRPr lang="pt-BR"/>
           </a:p>
@@ -3226,7 +3226,7 @@
           <a:p>
             <a:fld id="{FEFD702A-A8EF-457F-BAD4-84D51B465407}" type="datetimeFigureOut">
               <a:rPr lang="pt-BR" smtClean="0"/>
-              <a:t>28/05/2026</a:t>
+              <a:t>11/06/2026</a:t>
             </a:fld>
             <a:endParaRPr lang="pt-BR"/>
           </a:p>
@@ -3458,7 +3458,7 @@
           <a:p>
             <a:fld id="{FEFD702A-A8EF-457F-BAD4-84D51B465407}" type="datetimeFigureOut">
               <a:rPr lang="pt-BR" smtClean="0"/>
-              <a:t>28/05/2026</a:t>
+              <a:t>11/06/2026</a:t>
             </a:fld>
             <a:endParaRPr lang="pt-BR"/>
           </a:p>
@@ -3832,7 +3832,7 @@
           <a:p>
             <a:fld id="{FEFD702A-A8EF-457F-BAD4-84D51B465407}" type="datetimeFigureOut">
               <a:rPr lang="pt-BR" smtClean="0"/>
-              <a:t>28/05/2026</a:t>
+              <a:t>11/06/2026</a:t>
             </a:fld>
             <a:endParaRPr lang="pt-BR"/>
           </a:p>
@@ -3955,7 +3955,7 @@
           <a:p>
             <a:fld id="{FEFD702A-A8EF-457F-BAD4-84D51B465407}" type="datetimeFigureOut">
               <a:rPr lang="pt-BR" smtClean="0"/>
-              <a:t>28/05/2026</a:t>
+              <a:t>11/06/2026</a:t>
             </a:fld>
             <a:endParaRPr lang="pt-BR"/>
           </a:p>
@@ -4050,7 +4050,7 @@
           <a:p>
             <a:fld id="{FEFD702A-A8EF-457F-BAD4-84D51B465407}" type="datetimeFigureOut">
               <a:rPr lang="pt-BR" smtClean="0"/>
-              <a:t>28/05/2026</a:t>
+              <a:t>11/06/2026</a:t>
             </a:fld>
             <a:endParaRPr lang="pt-BR"/>
           </a:p>
@@ -4305,7 +4305,7 @@
           <a:p>
             <a:fld id="{FEFD702A-A8EF-457F-BAD4-84D51B465407}" type="datetimeFigureOut">
               <a:rPr lang="pt-BR" smtClean="0"/>
-              <a:t>28/05/2026</a:t>
+              <a:t>11/06/2026</a:t>
             </a:fld>
             <a:endParaRPr lang="pt-BR"/>
           </a:p>
@@ -4568,7 +4568,7 @@
           <a:p>
             <a:fld id="{FEFD702A-A8EF-457F-BAD4-84D51B465407}" type="datetimeFigureOut">
               <a:rPr lang="pt-BR" smtClean="0"/>
-              <a:t>28/05/2026</a:t>
+              <a:t>11/06/2026</a:t>
             </a:fld>
             <a:endParaRPr lang="pt-BR"/>
           </a:p>
@@ -5311,7 +5311,7 @@
           <a:p>
             <a:fld id="{FEFD702A-A8EF-457F-BAD4-84D51B465407}" type="datetimeFigureOut">
               <a:rPr lang="pt-BR" smtClean="0"/>
-              <a:t>28/05/2026</a:t>
+              <a:t>11/06/2026</a:t>
             </a:fld>
             <a:endParaRPr lang="pt-BR"/>
           </a:p>
@@ -6086,7 +6086,7 @@
   </p:clrMapOvr>
   <mc:AlternateContent xmlns:mc="http://schemas.openxmlformats.org/markup-compatibility/2006">
     <mc:Choice xmlns:p14="http://schemas.microsoft.com/office/powerpoint/2010/main" Requires="p14">
-      <p:transition p14:dur="0"/>
+      <p:transition p14:dur="10"/>
     </mc:Choice>
     <mc:Fallback>
       <p:transition/>
@@ -6095,331 +6095,9 @@
   <p:timing>
     <p:tnLst>
       <p:par>
-        <p:cTn id="1" dur="indefinite" restart="never" nodeType="tmRoot">
-          <p:childTnLst>
-            <p:seq concurrent="1" nextAc="seek">
-              <p:cTn id="2" dur="indefinite" nodeType="mainSeq">
-                <p:childTnLst>
-                  <p:par>
-                    <p:cTn id="3" fill="hold">
-                      <p:stCondLst>
-                        <p:cond delay="indefinite"/>
-                      </p:stCondLst>
-                      <p:childTnLst>
-                        <p:par>
-                          <p:cTn id="4" fill="hold">
-                            <p:stCondLst>
-                              <p:cond delay="0"/>
-                            </p:stCondLst>
-                            <p:childTnLst>
-                              <p:par>
-                                <p:cTn id="5" presetID="26" presetClass="entr" presetSubtype="0" fill="hold" grpId="0" nodeType="clickEffect">
-                                  <p:stCondLst>
-                                    <p:cond delay="0"/>
-                                  </p:stCondLst>
-                                  <p:childTnLst>
-                                    <p:set>
-                                      <p:cBhvr>
-                                        <p:cTn id="6" dur="1" fill="hold">
-                                          <p:stCondLst>
-                                            <p:cond delay="0"/>
-                                          </p:stCondLst>
-                                        </p:cTn>
-                                        <p:tgtEl>
-                                          <p:spTgt spid="2"/>
-                                        </p:tgtEl>
-                                        <p:attrNameLst>
-                                          <p:attrName>style.visibility</p:attrName>
-                                        </p:attrNameLst>
-                                      </p:cBhvr>
-                                      <p:to>
-                                        <p:strVal val="visible"/>
-                                      </p:to>
-                                    </p:set>
-                                    <p:animEffect transition="in" filter="wipe(down)">
-                                      <p:cBhvr>
-                                        <p:cTn id="7" dur="580">
-                                          <p:stCondLst>
-                                            <p:cond delay="0"/>
-                                          </p:stCondLst>
-                                        </p:cTn>
-                                        <p:tgtEl>
-                                          <p:spTgt spid="2"/>
-                                        </p:tgtEl>
-                                      </p:cBhvr>
-                                    </p:animEffect>
-                                    <p:anim calcmode="lin" valueType="num">
-                                      <p:cBhvr>
-                                        <p:cTn id="8" dur="1822" tmFilter="0,0; 0.14,0.36; 0.43,0.73; 0.71,0.91; 1.0,1.0">
-                                          <p:stCondLst>
-                                            <p:cond delay="0"/>
-                                          </p:stCondLst>
-                                        </p:cTn>
-                                        <p:tgtEl>
-                                          <p:spTgt spid="2"/>
-                                        </p:tgtEl>
-                                        <p:attrNameLst>
-                                          <p:attrName>ppt_x</p:attrName>
-                                        </p:attrNameLst>
-                                      </p:cBhvr>
-                                      <p:tavLst>
-                                        <p:tav tm="0">
-                                          <p:val>
-                                            <p:strVal val="#ppt_x-0.25"/>
-                                          </p:val>
-                                        </p:tav>
-                                        <p:tav tm="100000">
-                                          <p:val>
-                                            <p:strVal val="#ppt_x"/>
-                                          </p:val>
-                                        </p:tav>
-                                      </p:tavLst>
-                                    </p:anim>
-                                    <p:anim calcmode="lin" valueType="num">
-                                      <p:cBhvr>
-                                        <p:cTn id="9" dur="664" tmFilter="0.0,0.0; 0.25,0.07; 0.50,0.2; 0.75,0.467; 1.0,1.0">
-                                          <p:stCondLst>
-                                            <p:cond delay="0"/>
-                                          </p:stCondLst>
-                                        </p:cTn>
-                                        <p:tgtEl>
-                                          <p:spTgt spid="2"/>
-                                        </p:tgtEl>
-                                        <p:attrNameLst>
-                                          <p:attrName>ppt_y</p:attrName>
-                                        </p:attrNameLst>
-                                      </p:cBhvr>
-                                      <p:tavLst>
-                                        <p:tav tm="0" fmla="#ppt_y-sin(pi*$)/3">
-                                          <p:val>
-                                            <p:fltVal val="0.5"/>
-                                          </p:val>
-                                        </p:tav>
-                                        <p:tav tm="100000">
-                                          <p:val>
-                                            <p:fltVal val="1"/>
-                                          </p:val>
-                                        </p:tav>
-                                      </p:tavLst>
-                                    </p:anim>
-                                    <p:anim calcmode="lin" valueType="num">
-                                      <p:cBhvr>
-                                        <p:cTn id="10" dur="664" tmFilter="0, 0; 0.125,0.2665; 0.25,0.4; 0.375,0.465; 0.5,0.5;  0.625,0.535; 0.75,0.6; 0.875,0.7335; 1,1">
-                                          <p:stCondLst>
-                                            <p:cond delay="664"/>
-                                          </p:stCondLst>
-                                        </p:cTn>
-                                        <p:tgtEl>
-                                          <p:spTgt spid="2"/>
-                                        </p:tgtEl>
-                                        <p:attrNameLst>
-                                          <p:attrName>ppt_y</p:attrName>
-                                        </p:attrNameLst>
-                                      </p:cBhvr>
-                                      <p:tavLst>
-                                        <p:tav tm="0" fmla="#ppt_y-sin(pi*$)/9">
-                                          <p:val>
-                                            <p:fltVal val="0"/>
-                                          </p:val>
-                                        </p:tav>
-                                        <p:tav tm="100000">
-                                          <p:val>
-                                            <p:fltVal val="1"/>
-                                          </p:val>
-                                        </p:tav>
-                                      </p:tavLst>
-                                    </p:anim>
-                                    <p:anim calcmode="lin" valueType="num">
-                                      <p:cBhvr>
-                                        <p:cTn id="11" dur="332" tmFilter="0, 0; 0.125,0.2665; 0.25,0.4; 0.375,0.465; 0.5,0.5;  0.625,0.535; 0.75,0.6; 0.875,0.7335; 1,1">
-                                          <p:stCondLst>
-                                            <p:cond delay="1324"/>
-                                          </p:stCondLst>
-                                        </p:cTn>
-                                        <p:tgtEl>
-                                          <p:spTgt spid="2"/>
-                                        </p:tgtEl>
-                                        <p:attrNameLst>
-                                          <p:attrName>ppt_y</p:attrName>
-                                        </p:attrNameLst>
-                                      </p:cBhvr>
-                                      <p:tavLst>
-                                        <p:tav tm="0" fmla="#ppt_y-sin(pi*$)/27">
-                                          <p:val>
-                                            <p:fltVal val="0"/>
-                                          </p:val>
-                                        </p:tav>
-                                        <p:tav tm="100000">
-                                          <p:val>
-                                            <p:fltVal val="1"/>
-                                          </p:val>
-                                        </p:tav>
-                                      </p:tavLst>
-                                    </p:anim>
-                                    <p:anim calcmode="lin" valueType="num">
-                                      <p:cBhvr>
-                                        <p:cTn id="12" dur="164" tmFilter="0, 0; 0.125,0.2665; 0.25,0.4; 0.375,0.465; 0.5,0.5;  0.625,0.535; 0.75,0.6; 0.875,0.7335; 1,1">
-                                          <p:stCondLst>
-                                            <p:cond delay="1656"/>
-                                          </p:stCondLst>
-                                        </p:cTn>
-                                        <p:tgtEl>
-                                          <p:spTgt spid="2"/>
-                                        </p:tgtEl>
-                                        <p:attrNameLst>
-                                          <p:attrName>ppt_y</p:attrName>
-                                        </p:attrNameLst>
-                                      </p:cBhvr>
-                                      <p:tavLst>
-                                        <p:tav tm="0" fmla="#ppt_y-sin(pi*$)/81">
-                                          <p:val>
-                                            <p:fltVal val="0"/>
-                                          </p:val>
-                                        </p:tav>
-                                        <p:tav tm="100000">
-                                          <p:val>
-                                            <p:fltVal val="1"/>
-                                          </p:val>
-                                        </p:tav>
-                                      </p:tavLst>
-                                    </p:anim>
-                                    <p:animScale>
-                                      <p:cBhvr>
-                                        <p:cTn id="13" dur="26">
-                                          <p:stCondLst>
-                                            <p:cond delay="650"/>
-                                          </p:stCondLst>
-                                        </p:cTn>
-                                        <p:tgtEl>
-                                          <p:spTgt spid="2"/>
-                                        </p:tgtEl>
-                                      </p:cBhvr>
-                                      <p:to x="100000" y="60000"/>
-                                    </p:animScale>
-                                    <p:animScale>
-                                      <p:cBhvr>
-                                        <p:cTn id="14" dur="166" decel="50000">
-                                          <p:stCondLst>
-                                            <p:cond delay="676"/>
-                                          </p:stCondLst>
-                                        </p:cTn>
-                                        <p:tgtEl>
-                                          <p:spTgt spid="2"/>
-                                        </p:tgtEl>
-                                      </p:cBhvr>
-                                      <p:to x="100000" y="100000"/>
-                                    </p:animScale>
-                                    <p:animScale>
-                                      <p:cBhvr>
-                                        <p:cTn id="15" dur="26">
-                                          <p:stCondLst>
-                                            <p:cond delay="1312"/>
-                                          </p:stCondLst>
-                                        </p:cTn>
-                                        <p:tgtEl>
-                                          <p:spTgt spid="2"/>
-                                        </p:tgtEl>
-                                      </p:cBhvr>
-                                      <p:to x="100000" y="80000"/>
-                                    </p:animScale>
-                                    <p:animScale>
-                                      <p:cBhvr>
-                                        <p:cTn id="16" dur="166" decel="50000">
-                                          <p:stCondLst>
-                                            <p:cond delay="1338"/>
-                                          </p:stCondLst>
-                                        </p:cTn>
-                                        <p:tgtEl>
-                                          <p:spTgt spid="2"/>
-                                        </p:tgtEl>
-                                      </p:cBhvr>
-                                      <p:to x="100000" y="100000"/>
-                                    </p:animScale>
-                                    <p:animScale>
-                                      <p:cBhvr>
-                                        <p:cTn id="17" dur="26">
-                                          <p:stCondLst>
-                                            <p:cond delay="1642"/>
-                                          </p:stCondLst>
-                                        </p:cTn>
-                                        <p:tgtEl>
-                                          <p:spTgt spid="2"/>
-                                        </p:tgtEl>
-                                      </p:cBhvr>
-                                      <p:to x="100000" y="90000"/>
-                                    </p:animScale>
-                                    <p:animScale>
-                                      <p:cBhvr>
-                                        <p:cTn id="18" dur="166" decel="50000">
-                                          <p:stCondLst>
-                                            <p:cond delay="1668"/>
-                                          </p:stCondLst>
-                                        </p:cTn>
-                                        <p:tgtEl>
-                                          <p:spTgt spid="2"/>
-                                        </p:tgtEl>
-                                      </p:cBhvr>
-                                      <p:to x="100000" y="100000"/>
-                                    </p:animScale>
-                                    <p:animScale>
-                                      <p:cBhvr>
-                                        <p:cTn id="19" dur="26">
-                                          <p:stCondLst>
-                                            <p:cond delay="1808"/>
-                                          </p:stCondLst>
-                                        </p:cTn>
-                                        <p:tgtEl>
-                                          <p:spTgt spid="2"/>
-                                        </p:tgtEl>
-                                      </p:cBhvr>
-                                      <p:to x="100000" y="95000"/>
-                                    </p:animScale>
-                                    <p:animScale>
-                                      <p:cBhvr>
-                                        <p:cTn id="20" dur="166" decel="50000">
-                                          <p:stCondLst>
-                                            <p:cond delay="1834"/>
-                                          </p:stCondLst>
-                                        </p:cTn>
-                                        <p:tgtEl>
-                                          <p:spTgt spid="2"/>
-                                        </p:tgtEl>
-                                      </p:cBhvr>
-                                      <p:to x="100000" y="100000"/>
-                                    </p:animScale>
-                                  </p:childTnLst>
-                                </p:cTn>
-                              </p:par>
-                            </p:childTnLst>
-                          </p:cTn>
-                        </p:par>
-                      </p:childTnLst>
-                    </p:cTn>
-                  </p:par>
-                </p:childTnLst>
-              </p:cTn>
-              <p:prevCondLst>
-                <p:cond evt="onPrev" delay="0">
-                  <p:tgtEl>
-                    <p:sldTgt/>
-                  </p:tgtEl>
-                </p:cond>
-              </p:prevCondLst>
-              <p:nextCondLst>
-                <p:cond evt="onNext" delay="0">
-                  <p:tgtEl>
-                    <p:sldTgt/>
-                  </p:tgtEl>
-                </p:cond>
-              </p:nextCondLst>
-            </p:seq>
-          </p:childTnLst>
-        </p:cTn>
+        <p:cTn id="1" dur="indefinite" restart="never" nodeType="tmRoot"/>
       </p:par>
     </p:tnLst>
-    <p:bldLst>
-      <p:bldP spid="2" grpId="0"/>
-    </p:bldLst>
   </p:timing>
 </p:sld>
 </file>
@@ -6737,9 +6415,14 @@
   <p:clrMapOvr>
     <a:masterClrMapping/>
   </p:clrMapOvr>
-  <p:transition spd="slow">
-    <p:push dir="u"/>
-  </p:transition>
+  <mc:AlternateContent xmlns:mc="http://schemas.openxmlformats.org/markup-compatibility/2006">
+    <mc:Choice xmlns:p14="http://schemas.microsoft.com/office/powerpoint/2010/main" Requires="p14">
+      <p:transition p14:dur="0"/>
+    </mc:Choice>
+    <mc:Fallback>
+      <p:transition/>
+    </mc:Fallback>
+  </mc:AlternateContent>
   <p:timing>
     <p:tnLst>
       <p:par>
@@ -6761,10 +6444,15 @@
                             </p:stCondLst>
                             <p:childTnLst>
                               <p:par>
-                                <p:cTn id="5" presetID="14" presetClass="entr" presetSubtype="10" fill="hold" nodeType="clickEffect">
+                                <p:cTn id="5" presetID="10" presetClass="entr" presetSubtype="0" fill="hold" grpId="0" nodeType="clickEffect" nodePh="1">
                                   <p:stCondLst>
                                     <p:cond delay="0"/>
                                   </p:stCondLst>
+                                  <p:endCondLst>
+                                    <p:cond evt="begin" delay="0">
+                                      <p:tn val="5"/>
+                                    </p:cond>
+                                  </p:endCondLst>
                                   <p:childTnLst>
                                     <p:set>
                                       <p:cBhvr>
@@ -6774,7 +6462,11 @@
                                           </p:stCondLst>
                                         </p:cTn>
                                         <p:tgtEl>
-                                          <p:spTgt spid="5"/>
+                                          <p:spTgt spid="3">
+                                            <p:txEl>
+                                              <p:pRg st="0" end="0"/>
+                                            </p:txEl>
+                                          </p:spTgt>
                                         </p:tgtEl>
                                         <p:attrNameLst>
                                           <p:attrName>style.visibility</p:attrName>
@@ -6784,11 +6476,15 @@
                                         <p:strVal val="visible"/>
                                       </p:to>
                                     </p:set>
-                                    <p:animEffect transition="in" filter="randombar(horizontal)">
+                                    <p:animEffect transition="in" filter="fade">
                                       <p:cBhvr>
                                         <p:cTn id="7" dur="500"/>
                                         <p:tgtEl>
-                                          <p:spTgt spid="5"/>
+                                          <p:spTgt spid="3">
+                                            <p:txEl>
+                                              <p:pRg st="0" end="0"/>
+                                            </p:txEl>
+                                          </p:spTgt>
                                         </p:tgtEl>
                                       </p:cBhvr>
                                     </p:animEffect>
@@ -6814,7 +6510,7 @@
                             </p:stCondLst>
                             <p:childTnLst>
                               <p:par>
-                                <p:cTn id="10" presetID="22" presetClass="entr" presetSubtype="4" fill="hold" grpId="0" nodeType="clickEffect">
+                                <p:cTn id="10" presetID="10" presetClass="entr" presetSubtype="0" fill="hold" grpId="0" nodeType="clickEffect">
                                   <p:stCondLst>
                                     <p:cond delay="0"/>
                                   </p:stCondLst>
@@ -6827,69 +6523,7 @@
                                           </p:stCondLst>
                                         </p:cTn>
                                         <p:tgtEl>
-                                          <p:spTgt spid="2"/>
-                                        </p:tgtEl>
-                                        <p:attrNameLst>
-                                          <p:attrName>style.visibility</p:attrName>
-                                        </p:attrNameLst>
-                                      </p:cBhvr>
-                                      <p:to>
-                                        <p:strVal val="visible"/>
-                                      </p:to>
-                                    </p:set>
-                                    <p:animEffect transition="in" filter="wipe(down)">
-                                      <p:cBhvr>
-                                        <p:cTn id="12" dur="500"/>
-                                        <p:tgtEl>
-                                          <p:spTgt spid="2"/>
-                                        </p:tgtEl>
-                                      </p:cBhvr>
-                                    </p:animEffect>
-                                  </p:childTnLst>
-                                </p:cTn>
-                              </p:par>
-                            </p:childTnLst>
-                          </p:cTn>
-                        </p:par>
-                      </p:childTnLst>
-                    </p:cTn>
-                  </p:par>
-                  <p:par>
-                    <p:cTn id="13" fill="hold">
-                      <p:stCondLst>
-                        <p:cond delay="indefinite"/>
-                      </p:stCondLst>
-                      <p:childTnLst>
-                        <p:par>
-                          <p:cTn id="14" fill="hold">
-                            <p:stCondLst>
-                              <p:cond delay="0"/>
-                            </p:stCondLst>
-                            <p:childTnLst>
-                              <p:par>
-                                <p:cTn id="15" presetID="10" presetClass="entr" presetSubtype="0" fill="hold" grpId="0" nodeType="clickEffect" nodePh="1">
-                                  <p:stCondLst>
-                                    <p:cond delay="0"/>
-                                  </p:stCondLst>
-                                  <p:endCondLst>
-                                    <p:cond evt="begin" delay="0">
-                                      <p:tn val="15"/>
-                                    </p:cond>
-                                  </p:endCondLst>
-                                  <p:childTnLst>
-                                    <p:set>
-                                      <p:cBhvr>
-                                        <p:cTn id="16" dur="1" fill="hold">
-                                          <p:stCondLst>
-                                            <p:cond delay="0"/>
-                                          </p:stCondLst>
-                                        </p:cTn>
-                                        <p:tgtEl>
-                                          <p:spTgt spid="3">
-                                            <p:txEl>
-                                              <p:pRg st="0" end="0"/>
-                                            </p:txEl>
-                                          </p:spTgt>
+                                          <p:spTgt spid="12"/>
                                         </p:tgtEl>
                                         <p:attrNameLst>
                                           <p:attrName>style.visibility</p:attrName>
@@ -6901,13 +6535,9 @@
                                     </p:set>
                                     <p:animEffect transition="in" filter="fade">
                                       <p:cBhvr>
-                                        <p:cTn id="17" dur="500"/>
+                                        <p:cTn id="12" dur="500"/>
                                         <p:tgtEl>
-                                          <p:spTgt spid="3">
-                                            <p:txEl>
-                                              <p:pRg st="0" end="0"/>
-                                            </p:txEl>
-                                          </p:spTgt>
+                                          <p:spTgt spid="12"/>
                                         </p:tgtEl>
                                       </p:cBhvr>
                                     </p:animEffect>
@@ -6942,8 +6572,8 @@
       </p:par>
     </p:tnLst>
     <p:bldLst>
-      <p:bldP spid="2" grpId="0"/>
       <p:bldP spid="3" grpId="0" build="p"/>
+      <p:bldP spid="12" grpId="0" animBg="1"/>
     </p:bldLst>
   </p:timing>
 </p:sld>
@@ -7529,9 +7159,14 @@
   <p:clrMapOvr>
     <a:masterClrMapping/>
   </p:clrMapOvr>
-  <p:transition spd="slow">
-    <p:push dir="u"/>
-  </p:transition>
+  <mc:AlternateContent xmlns:mc="http://schemas.openxmlformats.org/markup-compatibility/2006">
+    <mc:Choice xmlns:p14="http://schemas.microsoft.com/office/powerpoint/2010/main" Requires="p14">
+      <p:transition p14:dur="10"/>
+    </mc:Choice>
+    <mc:Fallback>
+      <p:transition/>
+    </mc:Fallback>
+  </mc:AlternateContent>
   <p:timing>
     <p:tnLst>
       <p:par>
@@ -7553,7 +7188,7 @@
                             </p:stCondLst>
                             <p:childTnLst>
                               <p:par>
-                                <p:cTn id="5" presetID="16" presetClass="entr" presetSubtype="21" fill="hold" nodeType="clickEffect">
+                                <p:cTn id="5" presetID="10" presetClass="entr" presetSubtype="0" fill="hold" nodeType="clickEffect">
                                   <p:stCondLst>
                                     <p:cond delay="0"/>
                                   </p:stCondLst>
@@ -7576,7 +7211,7 @@
                                         <p:strVal val="visible"/>
                                       </p:to>
                                     </p:set>
-                                    <p:animEffect transition="in" filter="barn(inVertical)">
+                                    <p:animEffect transition="in" filter="fade">
                                       <p:cBhvr>
                                         <p:cTn id="7" dur="500"/>
                                         <p:tgtEl>
@@ -7606,7 +7241,7 @@
                             </p:stCondLst>
                             <p:childTnLst>
                               <p:par>
-                                <p:cTn id="10" presetID="14" presetClass="entr" presetSubtype="10" fill="hold" nodeType="clickEffect">
+                                <p:cTn id="10" presetID="14" presetClass="entr" presetSubtype="10" fill="hold" grpId="0" nodeType="clickEffect">
                                   <p:stCondLst>
                                     <p:cond delay="0"/>
                                   </p:stCondLst>
@@ -7619,7 +7254,11 @@
                                           </p:stCondLst>
                                         </p:cTn>
                                         <p:tgtEl>
-                                          <p:spTgt spid="24"/>
+                                          <p:spTgt spid="4">
+                                            <p:txEl>
+                                              <p:pRg st="0" end="0"/>
+                                            </p:txEl>
+                                          </p:spTgt>
                                         </p:tgtEl>
                                         <p:attrNameLst>
                                           <p:attrName>style.visibility</p:attrName>
@@ -7633,7 +7272,11 @@
                                       <p:cBhvr>
                                         <p:cTn id="12" dur="500"/>
                                         <p:tgtEl>
-                                          <p:spTgt spid="24"/>
+                                          <p:spTgt spid="4">
+                                            <p:txEl>
+                                              <p:pRg st="0" end="0"/>
+                                            </p:txEl>
+                                          </p:spTgt>
                                         </p:tgtEl>
                                       </p:cBhvr>
                                     </p:animEffect>
@@ -7659,7 +7302,7 @@
                             </p:stCondLst>
                             <p:childTnLst>
                               <p:par>
-                                <p:cTn id="15" presetID="16" presetClass="entr" presetSubtype="21" fill="hold" grpId="0" nodeType="clickEffect">
+                                <p:cTn id="15" presetID="10" presetClass="entr" presetSubtype="0" fill="hold" grpId="0" nodeType="clickEffect">
                                   <p:stCondLst>
                                     <p:cond delay="0"/>
                                   </p:stCondLst>
@@ -7672,7 +7315,7 @@
                                           </p:stCondLst>
                                         </p:cTn>
                                         <p:tgtEl>
-                                          <p:spTgt spid="2"/>
+                                          <p:spTgt spid="10"/>
                                         </p:tgtEl>
                                         <p:attrNameLst>
                                           <p:attrName>style.visibility</p:attrName>
@@ -7682,72 +7325,11 @@
                                         <p:strVal val="visible"/>
                                       </p:to>
                                     </p:set>
-                                    <p:animEffect transition="in" filter="barn(inVertical)">
+                                    <p:animEffect transition="in" filter="fade">
                                       <p:cBhvr>
                                         <p:cTn id="17" dur="500"/>
                                         <p:tgtEl>
-                                          <p:spTgt spid="2"/>
-                                        </p:tgtEl>
-                                      </p:cBhvr>
-                                    </p:animEffect>
-                                  </p:childTnLst>
-                                </p:cTn>
-                              </p:par>
-                            </p:childTnLst>
-                          </p:cTn>
-                        </p:par>
-                      </p:childTnLst>
-                    </p:cTn>
-                  </p:par>
-                  <p:par>
-                    <p:cTn id="18" fill="hold">
-                      <p:stCondLst>
-                        <p:cond delay="indefinite"/>
-                      </p:stCondLst>
-                      <p:childTnLst>
-                        <p:par>
-                          <p:cTn id="19" fill="hold">
-                            <p:stCondLst>
-                              <p:cond delay="0"/>
-                            </p:stCondLst>
-                            <p:childTnLst>
-                              <p:par>
-                                <p:cTn id="20" presetID="14" presetClass="entr" presetSubtype="10" fill="hold" grpId="0" nodeType="clickEffect">
-                                  <p:stCondLst>
-                                    <p:cond delay="0"/>
-                                  </p:stCondLst>
-                                  <p:childTnLst>
-                                    <p:set>
-                                      <p:cBhvr>
-                                        <p:cTn id="21" dur="1" fill="hold">
-                                          <p:stCondLst>
-                                            <p:cond delay="0"/>
-                                          </p:stCondLst>
-                                        </p:cTn>
-                                        <p:tgtEl>
-                                          <p:spTgt spid="4">
-                                            <p:txEl>
-                                              <p:pRg st="0" end="0"/>
-                                            </p:txEl>
-                                          </p:spTgt>
-                                        </p:tgtEl>
-                                        <p:attrNameLst>
-                                          <p:attrName>style.visibility</p:attrName>
-                                        </p:attrNameLst>
-                                      </p:cBhvr>
-                                      <p:to>
-                                        <p:strVal val="visible"/>
-                                      </p:to>
-                                    </p:set>
-                                    <p:animEffect transition="in" filter="randombar(horizontal)">
-                                      <p:cBhvr>
-                                        <p:cTn id="22" dur="500"/>
-                                        <p:tgtEl>
-                                          <p:spTgt spid="4">
-                                            <p:txEl>
-                                              <p:pRg st="0" end="0"/>
-                                            </p:txEl>
-                                          </p:spTgt>
+                                          <p:spTgt spid="10"/>
                                         </p:tgtEl>
                                       </p:cBhvr>
                                     </p:animEffect>
@@ -7782,8 +7364,8 @@
       </p:par>
     </p:tnLst>
     <p:bldLst>
-      <p:bldP spid="2" grpId="0"/>
       <p:bldP spid="4" grpId="0" build="p"/>
+      <p:bldP spid="10" grpId="0" animBg="1"/>
     </p:bldLst>
   </p:timing>
 </p:sld>
@@ -8045,7 +7627,7 @@
         </p:blipFill>
         <p:spPr bwMode="auto">
           <a:xfrm>
-            <a:off x="4784250" y="746620"/>
+            <a:off x="4809417" y="746620"/>
             <a:ext cx="4493974" cy="5084293"/>
           </a:xfrm>
           <a:prstGeom prst="rect">
@@ -8073,9 +7655,18 @@
   <p:clrMapOvr>
     <a:masterClrMapping/>
   </p:clrMapOvr>
-  <p:transition spd="slow">
-    <p:push dir="u"/>
-  </p:transition>
+  <mc:AlternateContent xmlns:mc="http://schemas.openxmlformats.org/markup-compatibility/2006">
+    <mc:Choice xmlns:p14="http://schemas.microsoft.com/office/powerpoint/2010/main" Requires="p14">
+      <p:transition spd="med" p14:dur="700">
+        <p:fade/>
+      </p:transition>
+    </mc:Choice>
+    <mc:Fallback>
+      <p:transition spd="med">
+        <p:fade/>
+      </p:transition>
+    </mc:Fallback>
+  </mc:AlternateContent>
   <p:timing>
     <p:tnLst>
       <p:par>
@@ -8368,9 +7959,18 @@
   <p:clrMapOvr>
     <a:masterClrMapping/>
   </p:clrMapOvr>
-  <p:transition spd="slow">
-    <p:push dir="u"/>
-  </p:transition>
+  <mc:AlternateContent xmlns:mc="http://schemas.openxmlformats.org/markup-compatibility/2006">
+    <mc:Choice xmlns:p14="http://schemas.microsoft.com/office/powerpoint/2010/main" Requires="p14">
+      <p:transition spd="med" p14:dur="700">
+        <p:fade/>
+      </p:transition>
+    </mc:Choice>
+    <mc:Fallback>
+      <p:transition spd="med">
+        <p:fade/>
+      </p:transition>
+    </mc:Fallback>
+  </mc:AlternateContent>
   <p:timing>
     <p:tnLst>
       <p:par>
@@ -8592,16 +8192,7 @@
                 </a:solidFill>
                 <a:latin typeface="Algerian" panose="04020705040A02060702" pitchFamily="82" charset="0"/>
               </a:rPr>
-              <a:t> </a:t>
-            </a:r>
-            <a:r>
-              <a:rPr lang="pt-BR" dirty="0">
-                <a:solidFill>
-                  <a:schemeClr val="tx1"/>
-                </a:solidFill>
-                <a:latin typeface="Algerian" panose="04020705040A02060702" pitchFamily="82" charset="0"/>
-              </a:rPr>
-              <a:t>.</a:t>
+              <a:t> .</a:t>
             </a:r>
             <a:endParaRPr lang="pt-BR" dirty="0" smtClean="0">
               <a:solidFill>
@@ -9494,228 +9085,6 @@
           </a:p>
           <a:p>
             <a:endParaRPr lang="pt-BR" dirty="0"/>
-          </a:p>
-        </p:txBody>
-      </p:sp>
-      <p:sp>
-        <p:nvSpPr>
-          <p:cNvPr id="4" name="Rectangle 1"/>
-          <p:cNvSpPr>
-            <a:spLocks noChangeArrowheads="1"/>
-          </p:cNvSpPr>
-          <p:nvPr/>
-        </p:nvSpPr>
-        <p:spPr bwMode="auto">
-          <a:xfrm>
-            <a:off x="0" y="0"/>
-            <a:ext cx="12192000" cy="0"/>
-          </a:xfrm>
-          <a:prstGeom prst="rect">
-            <a:avLst/>
-          </a:prstGeom>
-          <a:noFill/>
-          <a:ln>
-            <a:noFill/>
-          </a:ln>
-          <a:effectLst/>
-          <a:extLst>
-            <a:ext uri="{909E8E84-426E-40DD-AFC4-6F175D3DCCD1}">
-              <a14:hiddenFill xmlns:a14="http://schemas.microsoft.com/office/drawing/2010/main">
-                <a:solidFill>
-                  <a:schemeClr val="accent1"/>
-                </a:solidFill>
-              </a14:hiddenFill>
-            </a:ext>
-            <a:ext uri="{91240B29-F687-4F45-9708-019B960494DF}">
-              <a14:hiddenLine xmlns:a14="http://schemas.microsoft.com/office/drawing/2010/main" w="9525">
-                <a:solidFill>
-                  <a:schemeClr val="tx1"/>
-                </a:solidFill>
-                <a:miter lim="800000"/>
-                <a:headEnd/>
-                <a:tailEnd/>
-              </a14:hiddenLine>
-            </a:ext>
-            <a:ext uri="{AF507438-7753-43E0-B8FC-AC1667EBCBE1}">
-              <a14:hiddenEffects xmlns:a14="http://schemas.microsoft.com/office/drawing/2010/main">
-                <a:effectLst>
-                  <a:outerShdw dist="35921" dir="2700000" algn="ctr" rotWithShape="0">
-                    <a:schemeClr val="bg2"/>
-                  </a:outerShdw>
-                </a:effectLst>
-              </a14:hiddenEffects>
-            </a:ext>
-          </a:extLst>
-        </p:spPr>
-        <p:txBody>
-          <a:bodyPr vert="horz" wrap="none" lIns="0" tIns="0" rIns="0" bIns="0" numCol="1" anchor="ctr" anchorCtr="0" compatLnSpc="1">
-            <a:prstTxWarp prst="textNoShape">
-              <a:avLst/>
-            </a:prstTxWarp>
-            <a:spAutoFit/>
-          </a:bodyPr>
-          <a:lstStyle/>
-          <a:p>
-            <a:pPr marL="0" marR="0" lvl="0" indent="0" algn="l" defTabSz="914400" rtl="0" eaLnBrk="0" fontAlgn="base" latinLnBrk="0" hangingPunct="0">
-              <a:lnSpc>
-                <a:spcPct val="100000"/>
-              </a:lnSpc>
-              <a:spcBef>
-                <a:spcPct val="0"/>
-              </a:spcBef>
-              <a:spcAft>
-                <a:spcPct val="0"/>
-              </a:spcAft>
-              <a:buClrTx/>
-              <a:buSzTx/>
-              <a:buFontTx/>
-              <a:buChar char="•"/>
-              <a:tabLst/>
-            </a:pPr>
-            <a:r>
-              <a:rPr kumimoji="0" lang="pt-BR" altLang="pt-BR" sz="1200" b="1" i="0" u="none" strike="noStrike" cap="none" normalizeH="0" baseline="0" smtClean="0">
-                <a:ln>
-                  <a:noFill/>
-                </a:ln>
-                <a:solidFill>
-                  <a:schemeClr val="tx1"/>
-                </a:solidFill>
-                <a:effectLst/>
-                <a:latin typeface="Google Sans"/>
-              </a:rPr>
-              <a:t>Matéria vs. Espírito</a:t>
-            </a:r>
-            <a:r>
-              <a:rPr kumimoji="0" lang="pt-BR" altLang="pt-BR" sz="1200" b="0" i="0" u="none" strike="noStrike" cap="none" normalizeH="0" baseline="0" smtClean="0">
-                <a:ln>
-                  <a:noFill/>
-                </a:ln>
-                <a:solidFill>
-                  <a:schemeClr val="tx1"/>
-                </a:solidFill>
-                <a:effectLst/>
-                <a:latin typeface="Google Sans"/>
-              </a:rPr>
-              <a:t>: o desejo de aproveitar a vida terrena (</a:t>
-            </a:r>
-            <a:r>
-              <a:rPr kumimoji="0" lang="pt-BR" altLang="pt-BR" sz="1200" b="0" i="1" u="none" strike="noStrike" cap="none" normalizeH="0" baseline="0" smtClean="0">
-                <a:ln>
-                  <a:noFill/>
-                </a:ln>
-                <a:solidFill>
-                  <a:schemeClr val="tx1"/>
-                </a:solidFill>
-                <a:effectLst/>
-                <a:latin typeface="Google Sans"/>
-              </a:rPr>
-              <a:t>carpe diem</a:t>
-            </a:r>
-            <a:r>
-              <a:rPr kumimoji="0" lang="pt-BR" altLang="pt-BR" sz="1200" b="0" i="0" u="none" strike="noStrike" cap="none" normalizeH="0" baseline="0" smtClean="0">
-                <a:ln>
-                  <a:noFill/>
-                </a:ln>
-                <a:solidFill>
-                  <a:schemeClr val="tx1"/>
-                </a:solidFill>
-                <a:effectLst/>
-                <a:latin typeface="Google Sans"/>
-              </a:rPr>
-              <a:t>) contra o medo do inferno e da morte (</a:t>
-            </a:r>
-            <a:r>
-              <a:rPr kumimoji="0" lang="pt-BR" altLang="pt-BR" sz="1200" b="0" i="1" u="none" strike="noStrike" cap="none" normalizeH="0" baseline="0" smtClean="0">
-                <a:ln>
-                  <a:noFill/>
-                </a:ln>
-                <a:solidFill>
-                  <a:schemeClr val="tx1"/>
-                </a:solidFill>
-                <a:effectLst/>
-                <a:latin typeface="Google Sans"/>
-              </a:rPr>
-              <a:t>memento mori</a:t>
-            </a:r>
-            <a:r>
-              <a:rPr kumimoji="0" lang="pt-BR" altLang="pt-BR" sz="1200" b="0" i="0" u="none" strike="noStrike" cap="none" normalizeH="0" baseline="0" smtClean="0">
-                <a:ln>
-                  <a:noFill/>
-                </a:ln>
-                <a:solidFill>
-                  <a:schemeClr val="tx1"/>
-                </a:solidFill>
-                <a:effectLst/>
-                <a:latin typeface="Google Sans"/>
-              </a:rPr>
-              <a:t>).</a:t>
-            </a:r>
-          </a:p>
-          <a:p>
-            <a:pPr marL="0" marR="0" lvl="0" indent="0" algn="l" defTabSz="914400" rtl="0" eaLnBrk="0" fontAlgn="base" latinLnBrk="0" hangingPunct="0">
-              <a:lnSpc>
-                <a:spcPct val="100000"/>
-              </a:lnSpc>
-              <a:spcBef>
-                <a:spcPct val="0"/>
-              </a:spcBef>
-              <a:spcAft>
-                <a:spcPct val="0"/>
-              </a:spcAft>
-              <a:buClrTx/>
-              <a:buSzTx/>
-              <a:buFontTx/>
-              <a:buChar char="•"/>
-              <a:tabLst/>
-            </a:pPr>
-            <a:r>
-              <a:rPr kumimoji="0" lang="pt-BR" altLang="pt-BR" sz="1200" b="1" i="0" u="none" strike="noStrike" cap="none" normalizeH="0" baseline="0" smtClean="0">
-                <a:ln>
-                  <a:noFill/>
-                </a:ln>
-                <a:solidFill>
-                  <a:schemeClr val="tx1"/>
-                </a:solidFill>
-                <a:effectLst/>
-                <a:latin typeface="Google Sans"/>
-              </a:rPr>
-              <a:t>Razão vs. Fé</a:t>
-            </a:r>
-            <a:r>
-              <a:rPr kumimoji="0" lang="pt-BR" altLang="pt-BR" sz="1200" b="0" i="0" u="none" strike="noStrike" cap="none" normalizeH="0" baseline="0" smtClean="0">
-                <a:ln>
-                  <a:noFill/>
-                </a:ln>
-                <a:solidFill>
-                  <a:schemeClr val="tx1"/>
-                </a:solidFill>
-                <a:effectLst/>
-                <a:latin typeface="Google Sans"/>
-              </a:rPr>
-              <a:t>: o choque entre o pensamento científico emergente e os dogmas religiosos tradicionais.</a:t>
-            </a:r>
-            <a:r>
-              <a:rPr kumimoji="0" lang="pt-BR" altLang="pt-BR" sz="800" b="0" i="0" u="none" strike="noStrike" cap="none" normalizeH="0" baseline="0" smtClean="0">
-                <a:ln>
-                  <a:noFill/>
-                </a:ln>
-                <a:solidFill>
-                  <a:schemeClr val="tx1"/>
-                </a:solidFill>
-                <a:effectLst/>
-              </a:rPr>
-              <a:t> </a:t>
-            </a:r>
-            <a:endParaRPr kumimoji="0" lang="pt-BR" altLang="pt-BR" sz="1800" b="0" i="0" u="none" strike="noStrike" cap="none" normalizeH="0" baseline="0" smtClean="0">
-              <a:ln>
-                <a:noFill/>
-              </a:ln>
-              <a:solidFill>
-                <a:schemeClr val="tx1"/>
-              </a:solidFill>
-              <a:effectLst/>
-              <a:latin typeface="Arial" panose="020B0604020202020204" pitchFamily="34" charset="0"/>
-            </a:endParaRPr>
           </a:p>
         </p:txBody>
       </p:sp>

--- a/Colocar atividades aleatorias/Apresentação1 (1).pptx
+++ b/Colocar atividades aleatorias/Apresentação1 (1).pptx
@@ -5853,8 +5853,8 @@
         </p:nvSpPr>
         <p:spPr>
           <a:xfrm>
-            <a:off x="-685770" y="1189579"/>
-            <a:ext cx="7766936" cy="1424595"/>
+            <a:off x="-1424346" y="1427358"/>
+            <a:ext cx="7766936" cy="1482060"/>
           </a:xfrm>
         </p:spPr>
         <p:txBody>
@@ -5862,27 +5862,27 @@
           <a:lstStyle/>
           <a:p>
             <a:r>
-              <a:rPr lang="pt-BR" sz="6600" dirty="0"/>
+              <a:rPr lang="pt-BR" sz="7200" dirty="0"/>
               <a:t>	</a:t>
             </a:r>
             <a:r>
-              <a:rPr lang="pt-BR" sz="9600" b="1" i="1" dirty="0" smtClean="0">
+              <a:rPr lang="pt-BR" sz="11500" b="1" i="1" dirty="0" smtClean="0">
                 <a:solidFill>
                   <a:schemeClr val="accent5">
                     <a:lumMod val="75000"/>
                   </a:schemeClr>
                 </a:solidFill>
-                <a:latin typeface="Algerian" panose="04020705040A02060702" pitchFamily="82" charset="0"/>
+                <a:latin typeface="Berlin Sans FB Demi" panose="020E0802020502020306" pitchFamily="34" charset="0"/>
               </a:rPr>
               <a:t>Barroco</a:t>
             </a:r>
-            <a:endParaRPr lang="pt-BR" sz="6600" b="1" i="1" dirty="0">
+            <a:endParaRPr lang="pt-BR" sz="7200" b="1" i="1" dirty="0">
               <a:solidFill>
                 <a:schemeClr val="accent5">
                   <a:lumMod val="75000"/>
                 </a:schemeClr>
               </a:solidFill>
-              <a:latin typeface="Algerian" panose="04020705040A02060702" pitchFamily="82" charset="0"/>
+              <a:latin typeface="Berlin Sans FB Demi" panose="020E0802020502020306" pitchFamily="34" charset="0"/>
             </a:endParaRPr>
           </a:p>
         </p:txBody>
@@ -5905,7 +5905,7 @@
         </p:nvSpPr>
         <p:spPr>
           <a:xfrm>
-            <a:off x="-3123412" y="2483546"/>
+            <a:off x="-3463047" y="2983916"/>
             <a:ext cx="7766936" cy="1096899"/>
           </a:xfrm>
         </p:spPr>
@@ -5916,15 +5916,26 @@
           <a:lstStyle/>
           <a:p>
             <a:r>
-              <a:rPr lang="pt-BR" sz="2400" b="1" dirty="0">
+              <a:rPr lang="pt-BR" sz="3200" b="1" dirty="0">
                 <a:solidFill>
                   <a:schemeClr val="accent5">
                     <a:lumMod val="75000"/>
                   </a:schemeClr>
                 </a:solidFill>
-                <a:latin typeface="Algerian" panose="04020705040A02060702" pitchFamily="82" charset="0"/>
+                <a:latin typeface="Berlin Sans FB Demi" panose="020E0802020502020306" pitchFamily="34" charset="0"/>
               </a:rPr>
-              <a:t>A arte com as mãos</a:t>
+              <a:t>A arte </a:t>
+            </a:r>
+            <a:r>
+              <a:rPr lang="pt-BR" sz="3200" b="1" dirty="0" smtClean="0">
+                <a:solidFill>
+                  <a:schemeClr val="accent5">
+                    <a:lumMod val="75000"/>
+                  </a:schemeClr>
+                </a:solidFill>
+                <a:latin typeface="Berlin Sans FB Demi" panose="020E0802020502020306" pitchFamily="34" charset="0"/>
+              </a:rPr>
+              <a:t>antiga </a:t>
             </a:r>
           </a:p>
         </p:txBody>
@@ -5979,7 +5990,7 @@
         </p:nvCxnSpPr>
         <p:spPr>
           <a:xfrm>
-            <a:off x="1360714" y="2318657"/>
+            <a:off x="961772" y="2754086"/>
             <a:ext cx="5720452" cy="0"/>
           </a:xfrm>
           <a:prstGeom prst="line">
@@ -6052,7 +6063,7 @@
         </p:nvCxnSpPr>
         <p:spPr>
           <a:xfrm>
-            <a:off x="1360714" y="2852057"/>
+            <a:off x="1432035" y="3501886"/>
             <a:ext cx="3167743" cy="0"/>
           </a:xfrm>
           <a:prstGeom prst="line">
@@ -6148,56 +6159,56 @@
           <a:lstStyle/>
           <a:p>
             <a:r>
-              <a:rPr lang="pt-BR" sz="5400" b="1" dirty="0">
+              <a:rPr lang="pt-BR" sz="6000" b="1" dirty="0">
                 <a:solidFill>
                   <a:schemeClr val="accent5">
                     <a:lumMod val="75000"/>
                   </a:schemeClr>
                 </a:solidFill>
-                <a:latin typeface="Algerian" panose="04020705040A02060702" pitchFamily="82" charset="0"/>
+                <a:latin typeface="Berlin Sans FB Demi" panose="020E0802020502020306" pitchFamily="34" charset="0"/>
               </a:rPr>
               <a:t>o que </a:t>
             </a:r>
             <a:r>
-              <a:rPr lang="pt-BR" sz="5400" b="1" dirty="0" smtClean="0">
+              <a:rPr lang="pt-BR" sz="6000" b="1" dirty="0" smtClean="0">
                 <a:solidFill>
                   <a:schemeClr val="accent5">
                     <a:lumMod val="75000"/>
                   </a:schemeClr>
                 </a:solidFill>
-                <a:latin typeface="Algerian" panose="04020705040A02060702" pitchFamily="82" charset="0"/>
+                <a:latin typeface="Berlin Sans FB Demi" panose="020E0802020502020306" pitchFamily="34" charset="0"/>
               </a:rPr>
               <a:t>é </a:t>
             </a:r>
             <a:r>
-              <a:rPr lang="pt-BR" sz="5400" b="1" dirty="0">
+              <a:rPr lang="pt-BR" sz="6000" b="1" dirty="0">
                 <a:solidFill>
                   <a:schemeClr val="accent5">
                     <a:lumMod val="75000"/>
                   </a:schemeClr>
                 </a:solidFill>
-                <a:latin typeface="Algerian" panose="04020705040A02060702" pitchFamily="82" charset="0"/>
+                <a:latin typeface="Berlin Sans FB Demi" panose="020E0802020502020306" pitchFamily="34" charset="0"/>
               </a:rPr>
               <a:t>o </a:t>
             </a:r>
             <a:r>
-              <a:rPr lang="pt-BR" sz="5400" b="1" dirty="0" smtClean="0">
+              <a:rPr lang="pt-BR" sz="6000" b="1" dirty="0" smtClean="0">
                 <a:solidFill>
                   <a:schemeClr val="accent5">
                     <a:lumMod val="75000"/>
                   </a:schemeClr>
                 </a:solidFill>
-                <a:latin typeface="Algerian" panose="04020705040A02060702" pitchFamily="82" charset="0"/>
+                <a:latin typeface="Berlin Sans FB Demi" panose="020E0802020502020306" pitchFamily="34" charset="0"/>
               </a:rPr>
               <a:t>barroco?</a:t>
             </a:r>
-            <a:endParaRPr lang="pt-BR" sz="5400" b="1" dirty="0">
+            <a:endParaRPr lang="pt-BR" sz="6000" b="1" dirty="0">
               <a:solidFill>
                 <a:schemeClr val="accent5">
                   <a:lumMod val="75000"/>
                 </a:schemeClr>
               </a:solidFill>
-              <a:latin typeface="Algerian" panose="04020705040A02060702" pitchFamily="82" charset="0"/>
+              <a:latin typeface="Berlin Sans FB Demi" panose="020E0802020502020306" pitchFamily="34" charset="0"/>
             </a:endParaRPr>
           </a:p>
         </p:txBody>
@@ -6220,7 +6231,7 @@
         </p:nvSpPr>
         <p:spPr>
           <a:xfrm>
-            <a:off x="443418" y="1435395"/>
+            <a:off x="261033" y="2134478"/>
             <a:ext cx="8596668" cy="2006306"/>
           </a:xfrm>
         </p:spPr>
@@ -6255,7 +6266,7 @@
         </p:nvCxnSpPr>
         <p:spPr>
           <a:xfrm flipV="1">
-            <a:off x="677335" y="1308683"/>
+            <a:off x="738295" y="1404376"/>
             <a:ext cx="6797256" cy="31019"/>
           </a:xfrm>
           <a:prstGeom prst="line">
@@ -6359,7 +6370,7 @@
         </p:nvSpPr>
         <p:spPr>
           <a:xfrm>
-            <a:off x="209501" y="2038785"/>
+            <a:off x="322713" y="2038785"/>
             <a:ext cx="7760792" cy="2976366"/>
           </a:xfrm>
           <a:prstGeom prst="roundRect">
@@ -6391,7 +6402,7 @@
           <a:p>
             <a:pPr algn="ctr"/>
             <a:r>
-              <a:rPr lang="pt-BR" sz="2400" b="1" dirty="0">
+              <a:rPr lang="pt-BR" sz="2800" b="1" dirty="0">
                 <a:solidFill>
                   <a:schemeClr val="accent5">
                     <a:lumMod val="75000"/>
@@ -6399,9 +6410,22 @@
                 </a:solidFill>
                 <a:latin typeface="Algerian" panose="04020705040A02060702" pitchFamily="82" charset="0"/>
               </a:rPr>
-              <a:t> o barroco seria um movimento cultural e artístico que surgiu na Itália no final do século XVI e se espalhou pelo mundo até o século XVIII.</a:t>
-            </a:r>
-            <a:endParaRPr lang="pt-BR" sz="2400" dirty="0"/>
+              <a:t> </a:t>
+            </a:r>
+            <a:r>
+              <a:rPr lang="pt-BR" sz="2800" b="1" dirty="0">
+                <a:solidFill>
+                  <a:schemeClr val="accent5">
+                    <a:lumMod val="75000"/>
+                  </a:schemeClr>
+                </a:solidFill>
+                <a:latin typeface="Berlin Sans FB Demi" panose="020E0802020502020306" pitchFamily="34" charset="0"/>
+              </a:rPr>
+              <a:t>o barroco seria um movimento cultural e artístico que surgiu na Itália no final do século XVI e se espalhou pelo mundo até o século XVIII.</a:t>
+            </a:r>
+            <a:endParaRPr lang="pt-BR" sz="2800" dirty="0">
+              <a:latin typeface="Berlin Sans FB Demi" panose="020E0802020502020306" pitchFamily="34" charset="0"/>
+            </a:endParaRPr>
           </a:p>
         </p:txBody>
       </p:sp>
@@ -6614,8 +6638,8 @@
         </p:nvSpPr>
         <p:spPr>
           <a:xfrm>
-            <a:off x="83207" y="105103"/>
-            <a:ext cx="4798993" cy="2000144"/>
+            <a:off x="-35479" y="0"/>
+            <a:ext cx="6082462" cy="2105247"/>
           </a:xfrm>
         </p:spPr>
         <p:txBody>
@@ -6625,55 +6649,55 @@
           <a:lstStyle/>
           <a:p>
             <a:r>
-              <a:rPr lang="pt-BR" sz="2400" b="1" dirty="0" smtClean="0">
+              <a:rPr lang="pt-BR" sz="3200" b="1" dirty="0" smtClean="0">
                 <a:solidFill>
                   <a:schemeClr val="accent5">
                     <a:lumMod val="75000"/>
                   </a:schemeClr>
                 </a:solidFill>
-                <a:latin typeface="Algerian" panose="04020705040A02060702" pitchFamily="82" charset="0"/>
+                <a:latin typeface="Berlin Sans FB Demi" panose="020E0802020502020306" pitchFamily="34" charset="0"/>
               </a:rPr>
               <a:t>Imagem ilustrativa da arte                 </a:t>
             </a:r>
             <a:br>
-              <a:rPr lang="pt-BR" sz="2400" b="1" dirty="0" smtClean="0">
+              <a:rPr lang="pt-BR" sz="3200" b="1" dirty="0" smtClean="0">
                 <a:solidFill>
                   <a:schemeClr val="accent5">
                     <a:lumMod val="75000"/>
                   </a:schemeClr>
                 </a:solidFill>
-                <a:latin typeface="Algerian" panose="04020705040A02060702" pitchFamily="82" charset="0"/>
+                <a:latin typeface="Berlin Sans FB Demi" panose="020E0802020502020306" pitchFamily="34" charset="0"/>
               </a:rPr>
             </a:br>
             <a:r>
-              <a:rPr lang="pt-BR" sz="2400" b="1" dirty="0" smtClean="0">
+              <a:rPr lang="pt-BR" sz="3200" b="1" dirty="0" smtClean="0">
                 <a:solidFill>
                   <a:schemeClr val="accent5">
                     <a:lumMod val="75000"/>
                   </a:schemeClr>
                 </a:solidFill>
-                <a:latin typeface="Algerian" panose="04020705040A02060702" pitchFamily="82" charset="0"/>
+                <a:latin typeface="Berlin Sans FB Demi" panose="020E0802020502020306" pitchFamily="34" charset="0"/>
               </a:rPr>
               <a:t>                </a:t>
             </a:r>
             <a:r>
-              <a:rPr lang="pt-BR" sz="3200" b="1" dirty="0" smtClean="0">
+              <a:rPr lang="pt-BR" sz="4000" b="1" dirty="0" smtClean="0">
                 <a:solidFill>
                   <a:schemeClr val="accent5">
                     <a:lumMod val="75000"/>
                   </a:schemeClr>
                 </a:solidFill>
-                <a:latin typeface="Algerian" panose="04020705040A02060702" pitchFamily="82" charset="0"/>
+                <a:latin typeface="Berlin Sans FB Demi" panose="020E0802020502020306" pitchFamily="34" charset="0"/>
               </a:rPr>
               <a:t>barroca</a:t>
             </a:r>
-            <a:endParaRPr lang="pt-BR" sz="3200" b="1" dirty="0">
+            <a:endParaRPr lang="pt-BR" sz="4000" b="1" dirty="0">
               <a:solidFill>
                 <a:schemeClr val="accent5">
                   <a:lumMod val="75000"/>
                 </a:schemeClr>
               </a:solidFill>
-              <a:latin typeface="Algerian" panose="04020705040A02060702" pitchFamily="82" charset="0"/>
+              <a:latin typeface="Berlin Sans FB Demi" panose="020E0802020502020306" pitchFamily="34" charset="0"/>
             </a:endParaRPr>
           </a:p>
         </p:txBody>
@@ -6949,49 +6973,6 @@
           </a:fontRef>
         </p:style>
       </p:cxnSp>
-      <p:cxnSp>
-        <p:nvCxnSpPr>
-          <p:cNvPr id="24" name="Conector reto 23">
-            <a:extLst>
-              <a:ext uri="{FF2B5EF4-FFF2-40B4-BE49-F238E27FC236}">
-                <a16:creationId xmlns:a16="http://schemas.microsoft.com/office/drawing/2014/main" id="{CC002CD9-2452-4F4C-AD0C-8350BA84C1C3}"/>
-              </a:ext>
-            </a:extLst>
-          </p:cNvPr>
-          <p:cNvCxnSpPr/>
-          <p:nvPr/>
-        </p:nvCxnSpPr>
-        <p:spPr>
-          <a:xfrm>
-            <a:off x="74430" y="2105247"/>
-            <a:ext cx="4625161" cy="0"/>
-          </a:xfrm>
-          <a:prstGeom prst="line">
-            <a:avLst/>
-          </a:prstGeom>
-          <a:ln>
-            <a:solidFill>
-              <a:schemeClr val="accent6">
-                <a:lumMod val="50000"/>
-              </a:schemeClr>
-            </a:solidFill>
-          </a:ln>
-        </p:spPr>
-        <p:style>
-          <a:lnRef idx="3">
-            <a:schemeClr val="accent6"/>
-          </a:lnRef>
-          <a:fillRef idx="0">
-            <a:schemeClr val="accent6"/>
-          </a:fillRef>
-          <a:effectRef idx="2">
-            <a:schemeClr val="accent6"/>
-          </a:effectRef>
-          <a:fontRef idx="minor">
-            <a:schemeClr val="tx1"/>
-          </a:fontRef>
-        </p:style>
-      </p:cxnSp>
       <p:sp>
         <p:nvSpPr>
           <p:cNvPr id="10" name="Retângulo Arredondado 9"/>
@@ -7000,8 +6981,8 @@
         </p:nvSpPr>
         <p:spPr>
           <a:xfrm>
-            <a:off x="184533" y="2256640"/>
-            <a:ext cx="4515058" cy="3431096"/>
+            <a:off x="165043" y="2362399"/>
+            <a:ext cx="4659946" cy="3574128"/>
           </a:xfrm>
           <a:prstGeom prst="roundRect">
             <a:avLst/>
@@ -7031,124 +7012,256 @@
           <a:lstStyle/>
           <a:p>
             <a:r>
-              <a:rPr lang="pt-BR" b="1" dirty="0">
+              <a:rPr lang="pt-BR" sz="2000" b="1" dirty="0">
                 <a:solidFill>
                   <a:schemeClr val="accent5">
                     <a:lumMod val="75000"/>
                   </a:schemeClr>
                 </a:solidFill>
-                <a:latin typeface="Algerian" panose="04020705040A02060702" pitchFamily="82" charset="0"/>
+                <a:latin typeface="Berlin Sans FB Demi" panose="020E0802020502020306" pitchFamily="34" charset="0"/>
               </a:rPr>
               <a:t>A</a:t>
             </a:r>
             <a:r>
-              <a:rPr lang="pt-BR" b="1" dirty="0">
-                <a:latin typeface="Algerian" panose="04020705040A02060702" pitchFamily="82" charset="0"/>
+              <a:rPr lang="pt-BR" sz="2000" b="1" dirty="0">
+                <a:latin typeface="Berlin Sans FB Demi" panose="020E0802020502020306" pitchFamily="34" charset="0"/>
               </a:rPr>
               <a:t> </a:t>
             </a:r>
             <a:r>
-              <a:rPr lang="pt-BR" b="1" dirty="0">
+              <a:rPr lang="pt-BR" sz="2000" b="1" dirty="0">
                 <a:solidFill>
                   <a:schemeClr val="accent5">
                     <a:lumMod val="75000"/>
                   </a:schemeClr>
                 </a:solidFill>
-                <a:latin typeface="Algerian" panose="04020705040A02060702" pitchFamily="82" charset="0"/>
+                <a:latin typeface="Berlin Sans FB Demi" panose="020E0802020502020306" pitchFamily="34" charset="0"/>
               </a:rPr>
               <a:t>arte barroca foca no drama e na </a:t>
             </a:r>
           </a:p>
           <a:p>
             <a:r>
-              <a:rPr lang="pt-BR" b="1" dirty="0">
+              <a:rPr lang="pt-BR" sz="2000" b="1" dirty="0">
                 <a:solidFill>
                   <a:schemeClr val="accent5">
                     <a:lumMod val="75000"/>
                   </a:schemeClr>
                 </a:solidFill>
-                <a:latin typeface="Algerian" panose="04020705040A02060702" pitchFamily="82" charset="0"/>
+                <a:latin typeface="Berlin Sans FB Demi" panose="020E0802020502020306" pitchFamily="34" charset="0"/>
               </a:rPr>
-              <a:t> emoção, utilizando o forte contraste de</a:t>
-            </a:r>
-          </a:p>
-          <a:p>
-            <a:r>
-              <a:rPr lang="pt-BR" b="1" dirty="0">
+              <a:t> emoção, utilizando o forte </a:t>
+            </a:r>
+            <a:r>
+              <a:rPr lang="pt-BR" sz="2000" b="1" dirty="0" smtClean="0">
                 <a:solidFill>
                   <a:schemeClr val="accent5">
                     <a:lumMod val="75000"/>
                   </a:schemeClr>
                 </a:solidFill>
-                <a:latin typeface="Algerian" panose="04020705040A02060702" pitchFamily="82" charset="0"/>
+                <a:latin typeface="Berlin Sans FB Demi" panose="020E0802020502020306" pitchFamily="34" charset="0"/>
               </a:rPr>
-              <a:t> luz e sombra (</a:t>
-            </a:r>
-            <a:r>
-              <a:rPr lang="pt-BR" b="1" i="1" dirty="0">
+              <a:t>contraste De</a:t>
+            </a:r>
+            <a:r>
+              <a:rPr lang="pt-BR" sz="2000" b="1" dirty="0" smtClean="0">
                 <a:solidFill>
                   <a:schemeClr val="accent5">
                     <a:lumMod val="75000"/>
                   </a:schemeClr>
                 </a:solidFill>
-                <a:latin typeface="Algerian" panose="04020705040A02060702" pitchFamily="82" charset="0"/>
+                <a:latin typeface="Berlin Sans FB Demi" panose="020E0802020502020306" pitchFamily="34" charset="0"/>
+              </a:rPr>
+              <a:t> </a:t>
+            </a:r>
+            <a:r>
+              <a:rPr lang="pt-BR" sz="2000" b="1" dirty="0" smtClean="0">
+                <a:solidFill>
+                  <a:schemeClr val="accent5">
+                    <a:lumMod val="75000"/>
+                  </a:schemeClr>
+                </a:solidFill>
+                <a:latin typeface="Berlin Sans FB Demi" panose="020E0802020502020306" pitchFamily="34" charset="0"/>
+              </a:rPr>
+              <a:t>luz </a:t>
+            </a:r>
+            <a:r>
+              <a:rPr lang="pt-BR" sz="2000" b="1" dirty="0">
+                <a:solidFill>
+                  <a:schemeClr val="accent5">
+                    <a:lumMod val="75000"/>
+                  </a:schemeClr>
+                </a:solidFill>
+                <a:latin typeface="Berlin Sans FB Demi" panose="020E0802020502020306" pitchFamily="34" charset="0"/>
+              </a:rPr>
+              <a:t>e sombra (</a:t>
+            </a:r>
+            <a:r>
+              <a:rPr lang="pt-BR" sz="2000" b="1" i="1" dirty="0">
+                <a:solidFill>
+                  <a:schemeClr val="accent5">
+                    <a:lumMod val="75000"/>
+                  </a:schemeClr>
+                </a:solidFill>
+                <a:latin typeface="Berlin Sans FB Demi" panose="020E0802020502020306" pitchFamily="34" charset="0"/>
               </a:rPr>
               <a:t>chiaroscuro</a:t>
             </a:r>
             <a:r>
-              <a:rPr lang="pt-BR" b="1" dirty="0">
+              <a:rPr lang="pt-BR" sz="2000" b="1" dirty="0">
                 <a:solidFill>
                   <a:schemeClr val="accent5">
                     <a:lumMod val="75000"/>
                   </a:schemeClr>
                 </a:solidFill>
-                <a:latin typeface="Algerian" panose="04020705040A02060702" pitchFamily="82" charset="0"/>
+                <a:latin typeface="Berlin Sans FB Demi" panose="020E0802020502020306" pitchFamily="34" charset="0"/>
               </a:rPr>
               <a:t>) para criar </a:t>
             </a:r>
-          </a:p>
-          <a:p>
-            <a:r>
-              <a:rPr lang="pt-BR" b="1" dirty="0">
+            <a:r>
+              <a:rPr lang="pt-BR" sz="2000" b="1" dirty="0" smtClean="0">
                 <a:solidFill>
                   <a:schemeClr val="accent5">
                     <a:lumMod val="75000"/>
                   </a:schemeClr>
                 </a:solidFill>
-                <a:latin typeface="Algerian" panose="04020705040A02060702" pitchFamily="82" charset="0"/>
+                <a:latin typeface="Berlin Sans FB Demi" panose="020E0802020502020306" pitchFamily="34" charset="0"/>
               </a:rPr>
-              <a:t>impacto. Suas obras priorizam o movimento,</a:t>
-            </a:r>
-          </a:p>
-          <a:p>
-            <a:r>
-              <a:rPr lang="pt-BR" b="1" dirty="0">
+              <a:t>impacto</a:t>
+            </a:r>
+            <a:r>
+              <a:rPr lang="pt-BR" sz="2000" b="1" dirty="0">
                 <a:solidFill>
                   <a:schemeClr val="accent5">
                     <a:lumMod val="75000"/>
                   </a:schemeClr>
                 </a:solidFill>
-                <a:latin typeface="Algerian" panose="04020705040A02060702" pitchFamily="82" charset="0"/>
+                <a:latin typeface="Berlin Sans FB Demi" panose="020E0802020502020306" pitchFamily="34" charset="0"/>
               </a:rPr>
-              <a:t> o realismo detalhado e as expressões </a:t>
-            </a:r>
-          </a:p>
-          <a:p>
-            <a:r>
-              <a:rPr lang="pt-BR" b="1" dirty="0">
+              <a:t>. Suas obras priorizam o </a:t>
+            </a:r>
+            <a:r>
+              <a:rPr lang="pt-BR" sz="2000" b="1" dirty="0" smtClean="0">
                 <a:solidFill>
                   <a:schemeClr val="accent5">
                     <a:lumMod val="75000"/>
                   </a:schemeClr>
                 </a:solidFill>
-                <a:latin typeface="Algerian" panose="04020705040A02060702" pitchFamily="82" charset="0"/>
+                <a:latin typeface="Berlin Sans FB Demi" panose="020E0802020502020306" pitchFamily="34" charset="0"/>
               </a:rPr>
-              <a:t>intensas para emocionar o espectador</a:t>
-            </a:r>
-            <a:endParaRPr lang="pt-BR" dirty="0"/>
-          </a:p>
-        </p:txBody>
-      </p:sp>
+              <a:t>movimento, o </a:t>
+            </a:r>
+            <a:r>
+              <a:rPr lang="pt-BR" sz="2000" b="1" dirty="0">
+                <a:solidFill>
+                  <a:schemeClr val="accent5">
+                    <a:lumMod val="75000"/>
+                  </a:schemeClr>
+                </a:solidFill>
+                <a:latin typeface="Berlin Sans FB Demi" panose="020E0802020502020306" pitchFamily="34" charset="0"/>
+              </a:rPr>
+              <a:t>realismo detalhado e as expressões </a:t>
+            </a:r>
+            <a:r>
+              <a:rPr lang="pt-BR" sz="2000" b="1" dirty="0" smtClean="0">
+                <a:solidFill>
+                  <a:schemeClr val="accent5">
+                    <a:lumMod val="75000"/>
+                  </a:schemeClr>
+                </a:solidFill>
+                <a:latin typeface="Berlin Sans FB Demi" panose="020E0802020502020306" pitchFamily="34" charset="0"/>
+              </a:rPr>
+              <a:t>intensas </a:t>
+            </a:r>
+            <a:r>
+              <a:rPr lang="pt-BR" sz="2000" b="1" dirty="0">
+                <a:solidFill>
+                  <a:schemeClr val="accent5">
+                    <a:lumMod val="75000"/>
+                  </a:schemeClr>
+                </a:solidFill>
+                <a:latin typeface="Berlin Sans FB Demi" panose="020E0802020502020306" pitchFamily="34" charset="0"/>
+              </a:rPr>
+              <a:t>para emocionar o espectador</a:t>
+            </a:r>
+            <a:endParaRPr lang="pt-BR" sz="2000" dirty="0">
+              <a:latin typeface="Berlin Sans FB Demi" panose="020E0802020502020306" pitchFamily="34" charset="0"/>
+            </a:endParaRPr>
+          </a:p>
+        </p:txBody>
+      </p:sp>
+      <p:cxnSp>
+        <p:nvCxnSpPr>
+          <p:cNvPr id="13" name="Conector reto 12">
+            <a:extLst>
+              <a:ext uri="{FF2B5EF4-FFF2-40B4-BE49-F238E27FC236}">
+                <a16:creationId xmlns:a16="http://schemas.microsoft.com/office/drawing/2014/main" id="{AB0E0C5F-14C2-405C-B64C-4F89509906DA}"/>
+              </a:ext>
+            </a:extLst>
+          </p:cNvPr>
+          <p:cNvCxnSpPr/>
+          <p:nvPr/>
+        </p:nvCxnSpPr>
+        <p:spPr>
+          <a:xfrm flipV="1">
+            <a:off x="165043" y="1402079"/>
+            <a:ext cx="4754880" cy="17418"/>
+          </a:xfrm>
+          <a:prstGeom prst="line">
+            <a:avLst/>
+          </a:prstGeom>
+        </p:spPr>
+        <p:style>
+          <a:lnRef idx="3">
+            <a:schemeClr val="dk1"/>
+          </a:lnRef>
+          <a:fillRef idx="0">
+            <a:schemeClr val="dk1"/>
+          </a:fillRef>
+          <a:effectRef idx="2">
+            <a:schemeClr val="dk1"/>
+          </a:effectRef>
+          <a:fontRef idx="minor">
+            <a:schemeClr val="tx1"/>
+          </a:fontRef>
+        </p:style>
+      </p:cxnSp>
+      <p:cxnSp>
+        <p:nvCxnSpPr>
+          <p:cNvPr id="16" name="Conector reto 15">
+            <a:extLst>
+              <a:ext uri="{FF2B5EF4-FFF2-40B4-BE49-F238E27FC236}">
+                <a16:creationId xmlns:a16="http://schemas.microsoft.com/office/drawing/2014/main" id="{AB0E0C5F-14C2-405C-B64C-4F89509906DA}"/>
+              </a:ext>
+            </a:extLst>
+          </p:cNvPr>
+          <p:cNvCxnSpPr/>
+          <p:nvPr/>
+        </p:nvCxnSpPr>
+        <p:spPr>
+          <a:xfrm flipV="1">
+            <a:off x="1500852" y="2041547"/>
+            <a:ext cx="2083261" cy="8710"/>
+          </a:xfrm>
+          <a:prstGeom prst="line">
+            <a:avLst/>
+          </a:prstGeom>
+        </p:spPr>
+        <p:style>
+          <a:lnRef idx="3">
+            <a:schemeClr val="dk1"/>
+          </a:lnRef>
+          <a:fillRef idx="0">
+            <a:schemeClr val="dk1"/>
+          </a:fillRef>
+          <a:effectRef idx="2">
+            <a:schemeClr val="dk1"/>
+          </a:effectRef>
+          <a:fontRef idx="minor">
+            <a:schemeClr val="tx1"/>
+          </a:fontRef>
+        </p:style>
+      </p:cxnSp>
     </p:spTree>
     <p:extLst>
       <p:ext uri="{BB962C8B-B14F-4D97-AF65-F5344CB8AC3E}">
@@ -7396,8 +7509,8 @@
         </p:nvSpPr>
         <p:spPr>
           <a:xfrm>
-            <a:off x="483476" y="2394030"/>
-            <a:ext cx="4077651" cy="3436883"/>
+            <a:off x="287384" y="2022232"/>
+            <a:ext cx="4273744" cy="3808682"/>
           </a:xfrm>
           <a:prstGeom prst="roundRect">
             <a:avLst/>
@@ -7443,71 +7556,8 @@
         </p:nvSpPr>
         <p:spPr>
           <a:xfrm>
-            <a:off x="706599" y="514924"/>
-            <a:ext cx="3854528" cy="1278466"/>
-          </a:xfrm>
-        </p:spPr>
-        <p:txBody>
-          <a:bodyPr>
-            <a:normAutofit/>
-          </a:bodyPr>
-          <a:lstStyle/>
-          <a:p>
-            <a:r>
-              <a:rPr lang="pt-BR" b="1" dirty="0" smtClean="0">
-                <a:latin typeface="Algerian" panose="04020705040A02060702" pitchFamily="82" charset="0"/>
-              </a:rPr>
-              <a:t>        </a:t>
-            </a:r>
-            <a:r>
-              <a:rPr lang="pt-BR" dirty="0" smtClean="0">
-                <a:latin typeface="Algerian" panose="04020705040A02060702" pitchFamily="82" charset="0"/>
-              </a:rPr>
-              <a:t>Importância da arte </a:t>
-            </a:r>
-            <a:r>
-              <a:rPr lang="pt-BR" b="1" dirty="0" smtClean="0">
-                <a:latin typeface="Algerian" panose="04020705040A02060702" pitchFamily="82" charset="0"/>
-              </a:rPr>
-              <a:t/>
-            </a:r>
-            <a:br>
-              <a:rPr lang="pt-BR" b="1" dirty="0" smtClean="0">
-                <a:latin typeface="Algerian" panose="04020705040A02060702" pitchFamily="82" charset="0"/>
-              </a:rPr>
-            </a:br>
-            <a:r>
-              <a:rPr lang="pt-BR" sz="2400" b="1" dirty="0">
-                <a:latin typeface="Algerian" panose="04020705040A02060702" pitchFamily="82" charset="0"/>
-              </a:rPr>
-              <a:t> </a:t>
-            </a:r>
-            <a:r>
-              <a:rPr lang="pt-BR" sz="2400" b="1" dirty="0" smtClean="0">
-                <a:latin typeface="Algerian" panose="04020705040A02060702" pitchFamily="82" charset="0"/>
-              </a:rPr>
-              <a:t>               Barroca</a:t>
-            </a:r>
-            <a:endParaRPr lang="pt-BR" b="1" dirty="0">
-              <a:latin typeface="Algerian" panose="04020705040A02060702" pitchFamily="82" charset="0"/>
-            </a:endParaRPr>
-          </a:p>
-        </p:txBody>
-      </p:sp>
-      <p:sp>
-        <p:nvSpPr>
-          <p:cNvPr id="4" name="Espaço Reservado para Texto 3"/>
-          <p:cNvSpPr>
-            <a:spLocks noGrp="1"/>
-          </p:cNvSpPr>
-          <p:nvPr>
-            <p:ph type="body" sz="half" idx="2"/>
-          </p:nvPr>
-        </p:nvSpPr>
-        <p:spPr>
-          <a:xfrm>
-            <a:off x="687695" y="2573503"/>
-            <a:ext cx="3892336" cy="3475345"/>
+            <a:off x="-310018" y="226880"/>
+            <a:ext cx="5119435" cy="1636636"/>
           </a:xfrm>
         </p:spPr>
         <p:txBody>
@@ -7517,13 +7567,76 @@
           <a:lstStyle/>
           <a:p>
             <a:r>
-              <a:rPr lang="pt-BR" sz="1800" b="1" dirty="0">
+              <a:rPr lang="pt-BR" sz="3200" b="1" dirty="0" smtClean="0">
+                <a:latin typeface="Berlin Sans FB Demi" panose="020E0802020502020306" pitchFamily="34" charset="0"/>
+              </a:rPr>
+              <a:t>        </a:t>
+            </a:r>
+            <a:r>
+              <a:rPr lang="pt-BR" sz="3200" dirty="0" smtClean="0">
+                <a:latin typeface="Berlin Sans FB Demi" panose="020E0802020502020306" pitchFamily="34" charset="0"/>
+              </a:rPr>
+              <a:t>Importância da arte </a:t>
+            </a:r>
+            <a:r>
+              <a:rPr lang="pt-BR" sz="3200" b="1" dirty="0" smtClean="0">
+                <a:latin typeface="Berlin Sans FB Demi" panose="020E0802020502020306" pitchFamily="34" charset="0"/>
+              </a:rPr>
+              <a:t/>
+            </a:r>
+            <a:br>
+              <a:rPr lang="pt-BR" sz="3200" b="1" dirty="0" smtClean="0">
+                <a:latin typeface="Berlin Sans FB Demi" panose="020E0802020502020306" pitchFamily="34" charset="0"/>
+              </a:rPr>
+            </a:br>
+            <a:r>
+              <a:rPr lang="pt-BR" sz="3600" b="1" dirty="0">
+                <a:latin typeface="Berlin Sans FB Demi" panose="020E0802020502020306" pitchFamily="34" charset="0"/>
+              </a:rPr>
+              <a:t> </a:t>
+            </a:r>
+            <a:r>
+              <a:rPr lang="pt-BR" sz="3600" b="1" dirty="0" smtClean="0">
+                <a:latin typeface="Berlin Sans FB Demi" panose="020E0802020502020306" pitchFamily="34" charset="0"/>
+              </a:rPr>
+              <a:t>               Barroca</a:t>
+            </a:r>
+            <a:endParaRPr lang="pt-BR" sz="3200" b="1" dirty="0">
+              <a:latin typeface="Berlin Sans FB Demi" panose="020E0802020502020306" pitchFamily="34" charset="0"/>
+            </a:endParaRPr>
+          </a:p>
+        </p:txBody>
+      </p:sp>
+      <p:sp>
+        <p:nvSpPr>
+          <p:cNvPr id="4" name="Espaço Reservado para Texto 3"/>
+          <p:cNvSpPr>
+            <a:spLocks noGrp="1"/>
+          </p:cNvSpPr>
+          <p:nvPr>
+            <p:ph type="body" sz="half" idx="2"/>
+          </p:nvPr>
+        </p:nvSpPr>
+        <p:spPr>
+          <a:xfrm>
+            <a:off x="505835" y="2110822"/>
+            <a:ext cx="4179437" cy="4098128"/>
+          </a:xfrm>
+        </p:spPr>
+        <p:txBody>
+          <a:bodyPr>
+            <a:noAutofit/>
+          </a:bodyPr>
+          <a:lstStyle/>
+          <a:p>
+            <a:r>
+              <a:rPr lang="pt-BR" sz="2000" b="1" dirty="0">
                 <a:solidFill>
                   <a:schemeClr val="tx1">
                     <a:lumMod val="75000"/>
                   </a:schemeClr>
                 </a:solidFill>
-                <a:latin typeface="Algerian" panose="04020705040A02060702" pitchFamily="82" charset="0"/>
+                <a:latin typeface="Berlin Sans FB Demi" panose="020E0802020502020306" pitchFamily="34" charset="0"/>
               </a:rPr>
               <a:t>foi fundamental por atuar como uma poderosa ferramenta de comunicação visual e política no século XVII. Desenvolvida no contexto da Contrarreforma Católica, ela buscava emocionar os fiéis e reafirmar o poder da Igreja por meio de contraste, dramaticidade e riqueza de detalhes</a:t>
             </a:r>
@@ -7543,9 +7656,9 @@
           <p:nvPr/>
         </p:nvCxnSpPr>
         <p:spPr>
-          <a:xfrm>
-            <a:off x="1361534" y="1387365"/>
-            <a:ext cx="2690648" cy="0"/>
+          <a:xfrm flipV="1">
+            <a:off x="631372" y="1227908"/>
+            <a:ext cx="3585768" cy="34834"/>
           </a:xfrm>
           <a:prstGeom prst="line">
             <a:avLst/>
@@ -7580,7 +7693,7 @@
         </p:nvCxnSpPr>
         <p:spPr>
           <a:xfrm>
-            <a:off x="2007921" y="1704798"/>
+            <a:off x="1697300" y="1800474"/>
             <a:ext cx="1397875" cy="0"/>
           </a:xfrm>
           <a:prstGeom prst="line">
@@ -7793,45 +7906,41 @@
           <a:lstStyle/>
           <a:p>
             <a:r>
-              <a:rPr lang="pt-BR" sz="4000" dirty="0" smtClean="0">
-                <a:latin typeface="Algerian" panose="04020705040A02060702" pitchFamily="82" charset="0"/>
+              <a:rPr lang="pt-BR" sz="4800" dirty="0" smtClean="0">
+                <a:latin typeface="Berlin Sans FB Demi" panose="020E0802020502020306" pitchFamily="34" charset="0"/>
               </a:rPr>
               <a:t>Os maiores nomes no brasil da  </a:t>
             </a:r>
             <a:br>
-              <a:rPr lang="pt-BR" sz="4000" dirty="0" smtClean="0">
-                <a:latin typeface="Algerian" panose="04020705040A02060702" pitchFamily="82" charset="0"/>
+              <a:rPr lang="pt-BR" sz="4800" dirty="0" smtClean="0">
+                <a:latin typeface="Berlin Sans FB Demi" panose="020E0802020502020306" pitchFamily="34" charset="0"/>
               </a:rPr>
             </a:br>
             <a:r>
-              <a:rPr lang="pt-BR" sz="4000" dirty="0">
-                <a:latin typeface="Algerian" panose="04020705040A02060702" pitchFamily="82" charset="0"/>
+              <a:rPr lang="pt-BR" sz="4800" dirty="0">
+                <a:latin typeface="Berlin Sans FB Demi" panose="020E0802020502020306" pitchFamily="34" charset="0"/>
               </a:rPr>
               <a:t> </a:t>
             </a:r>
             <a:r>
-              <a:rPr lang="pt-BR" sz="4000" dirty="0" smtClean="0">
-                <a:latin typeface="Algerian" panose="04020705040A02060702" pitchFamily="82" charset="0"/>
+              <a:rPr lang="pt-BR" sz="4800" dirty="0" smtClean="0">
+                <a:latin typeface="Berlin Sans FB Demi" panose="020E0802020502020306" pitchFamily="34" charset="0"/>
               </a:rPr>
-              <a:t>                arte</a:t>
-            </a:r>
-            <a:r>
-              <a:rPr lang="pt-BR" sz="4000" dirty="0" smtClean="0"/>
-              <a:t> </a:t>
-            </a:r>
-            <a:r>
-              <a:rPr lang="pt-BR" sz="4000" b="1" dirty="0" smtClean="0">
-                <a:latin typeface="Algerian" panose="04020705040A02060702" pitchFamily="82" charset="0"/>
+              <a:t>                arte </a:t>
+            </a:r>
+            <a:r>
+              <a:rPr lang="pt-BR" sz="4800" b="1" dirty="0" smtClean="0">
+                <a:latin typeface="Berlin Sans FB Demi" panose="020E0802020502020306" pitchFamily="34" charset="0"/>
               </a:rPr>
               <a:t>barroca</a:t>
             </a:r>
             <a:br>
-              <a:rPr lang="pt-BR" sz="4000" b="1" dirty="0" smtClean="0">
-                <a:latin typeface="Algerian" panose="04020705040A02060702" pitchFamily="82" charset="0"/>
+              <a:rPr lang="pt-BR" sz="4800" b="1" dirty="0" smtClean="0">
+                <a:latin typeface="Berlin Sans FB Demi" panose="020E0802020502020306" pitchFamily="34" charset="0"/>
               </a:rPr>
             </a:br>
-            <a:endParaRPr lang="pt-BR" sz="4000" b="1" dirty="0">
-              <a:latin typeface="Algerian" panose="04020705040A02060702" pitchFamily="82" charset="0"/>
+            <a:endParaRPr lang="pt-BR" sz="4800" b="1" dirty="0">
+              <a:latin typeface="Berlin Sans FB Demi" panose="020E0802020502020306" pitchFamily="34" charset="0"/>
             </a:endParaRPr>
           </a:p>
         </p:txBody>
@@ -7905,7 +8014,7 @@
         </p:nvSpPr>
         <p:spPr>
           <a:xfrm>
-            <a:off x="884493" y="2254390"/>
+            <a:off x="677335" y="2335854"/>
             <a:ext cx="8182351" cy="3240399"/>
           </a:xfrm>
           <a:prstGeom prst="roundRect">
@@ -7943,9 +8052,20 @@
                 </a:solidFill>
                 <a:latin typeface="Algerian" panose="04020705040A02060702" pitchFamily="82" charset="0"/>
               </a:rPr>
-              <a:t> No Brasil, os maiores nomes da literatura são Gregório de Matos e Padre      Antônio Vieira, enquanto nas artes plásticas destacam-se Aleijadinho e Mestre Ataíde. Internacionalmente, figuras como Caravaggio na pintura e Johann Sebastian Bach na música definiram o período</a:t>
-            </a:r>
-            <a:endParaRPr lang="pt-BR" sz="2000" dirty="0"/>
+              <a:t> </a:t>
+            </a:r>
+            <a:r>
+              <a:rPr lang="pt-BR" sz="2000" b="1" dirty="0">
+                <a:solidFill>
+                  <a:schemeClr val="tx1"/>
+                </a:solidFill>
+                <a:latin typeface="Berlin Sans FB Demi" panose="020E0802020502020306" pitchFamily="34" charset="0"/>
+              </a:rPr>
+              <a:t>No Brasil, os maiores nomes da literatura são Gregório de Matos e Padre      Antônio Vieira, enquanto nas artes plásticas destacam-se Aleijadinho e Mestre Ataíde. Internacionalmente, figuras como Caravaggio na pintura e Johann Sebastian Bach na música definiram o período</a:t>
+            </a:r>
+            <a:endParaRPr lang="pt-BR" sz="2000" dirty="0">
+              <a:latin typeface="Berlin Sans FB Demi" panose="020E0802020502020306" pitchFamily="34" charset="0"/>
+            </a:endParaRPr>
           </a:p>
         </p:txBody>
       </p:sp>
@@ -8010,7 +8130,7 @@
         </p:nvSpPr>
         <p:spPr>
           <a:xfrm>
-            <a:off x="1603320" y="441904"/>
+            <a:off x="3127320" y="-38249"/>
             <a:ext cx="8596668" cy="1261145"/>
           </a:xfrm>
         </p:spPr>
@@ -8021,13 +8141,13 @@
           <a:lstStyle/>
           <a:p>
             <a:r>
-              <a:rPr lang="pt-BR" sz="5400" b="1" dirty="0" smtClean="0">
-                <a:latin typeface="Algerian" panose="04020705040A02060702" pitchFamily="82" charset="0"/>
+              <a:rPr lang="pt-BR" sz="6600" b="1" dirty="0" smtClean="0">
+                <a:latin typeface="Berlin Sans FB Demi" panose="020E0802020502020306" pitchFamily="34" charset="0"/>
               </a:rPr>
               <a:t>Artistas e obras </a:t>
             </a:r>
-            <a:endParaRPr lang="pt-BR" sz="5400" b="1" dirty="0">
-              <a:latin typeface="Algerian" panose="04020705040A02060702" pitchFamily="82" charset="0"/>
+            <a:endParaRPr lang="pt-BR" sz="6600" b="1" dirty="0">
+              <a:latin typeface="Berlin Sans FB Demi" panose="020E0802020502020306" pitchFamily="34" charset="0"/>
             </a:endParaRPr>
           </a:p>
         </p:txBody>
@@ -8044,7 +8164,7 @@
         </p:nvSpPr>
         <p:spPr>
           <a:xfrm>
-            <a:off x="2692867" y="696369"/>
+            <a:off x="2692867" y="530907"/>
             <a:ext cx="7407477" cy="5721208"/>
           </a:xfrm>
         </p:spPr>
@@ -8091,7 +8211,7 @@
                 <a:solidFill>
                   <a:schemeClr val="tx1"/>
                 </a:solidFill>
-                <a:latin typeface="Algerian" panose="04020705040A02060702" pitchFamily="82" charset="0"/>
+                <a:latin typeface="Berlin Sans FB Demi" panose="020E0802020502020306" pitchFamily="34" charset="0"/>
               </a:rPr>
               <a:t>Caravaggio </a:t>
             </a:r>
@@ -8100,7 +8220,7 @@
                 <a:solidFill>
                   <a:schemeClr val="tx1"/>
                 </a:solidFill>
-                <a:latin typeface="Algerian" panose="04020705040A02060702" pitchFamily="82" charset="0"/>
+                <a:latin typeface="Berlin Sans FB Demi" panose="020E0802020502020306" pitchFamily="34" charset="0"/>
               </a:rPr>
               <a:t>(Itália)</a:t>
             </a:r>
@@ -8109,7 +8229,7 @@
                 <a:solidFill>
                   <a:schemeClr val="tx1"/>
                 </a:solidFill>
-                <a:latin typeface="Algerian" panose="04020705040A02060702" pitchFamily="82" charset="0"/>
+                <a:latin typeface="Berlin Sans FB Demi" panose="020E0802020502020306" pitchFamily="34" charset="0"/>
               </a:rPr>
               <a:t>: Pioneiro no uso realista da iluminação dramática de fundo escuro</a:t>
             </a:r>
@@ -8118,7 +8238,7 @@
                 <a:solidFill>
                   <a:schemeClr val="tx1"/>
                 </a:solidFill>
-                <a:latin typeface="Algerian" panose="04020705040A02060702" pitchFamily="82" charset="0"/>
+                <a:latin typeface="Berlin Sans FB Demi" panose="020E0802020502020306" pitchFamily="34" charset="0"/>
               </a:rPr>
               <a:t>. </a:t>
             </a:r>
@@ -8127,7 +8247,7 @@
                 <a:solidFill>
                   <a:schemeClr val="tx1"/>
                 </a:solidFill>
-                <a:latin typeface="Algerian" panose="04020705040A02060702" pitchFamily="82" charset="0"/>
+                <a:latin typeface="Berlin Sans FB Demi" panose="020E0802020502020306" pitchFamily="34" charset="0"/>
               </a:rPr>
               <a:t>A </a:t>
             </a:r>
@@ -8136,7 +8256,7 @@
                 <a:solidFill>
                   <a:schemeClr val="tx1"/>
                 </a:solidFill>
-                <a:latin typeface="Algerian" panose="04020705040A02060702" pitchFamily="82" charset="0"/>
+                <a:latin typeface="Berlin Sans FB Demi" panose="020E0802020502020306" pitchFamily="34" charset="0"/>
               </a:rPr>
               <a:t>Vocação de São </a:t>
             </a:r>
@@ -8145,7 +8265,7 @@
                 <a:solidFill>
                   <a:schemeClr val="tx1"/>
                 </a:solidFill>
-                <a:latin typeface="Algerian" panose="04020705040A02060702" pitchFamily="82" charset="0"/>
+                <a:latin typeface="Berlin Sans FB Demi" panose="020E0802020502020306" pitchFamily="34" charset="0"/>
               </a:rPr>
               <a:t>Mateus,</a:t>
             </a:r>
@@ -8154,7 +8274,7 @@
                 <a:solidFill>
                   <a:schemeClr val="tx1"/>
                 </a:solidFill>
-                <a:latin typeface="Algerian" panose="04020705040A02060702" pitchFamily="82" charset="0"/>
+                <a:latin typeface="Berlin Sans FB Demi" panose="020E0802020502020306" pitchFamily="34" charset="0"/>
               </a:rPr>
               <a:t> </a:t>
             </a:r>
@@ -8163,7 +8283,7 @@
                 <a:solidFill>
                   <a:schemeClr val="tx1"/>
                 </a:solidFill>
-                <a:latin typeface="Algerian" panose="04020705040A02060702" pitchFamily="82" charset="0"/>
+                <a:latin typeface="Berlin Sans FB Demi" panose="020E0802020502020306" pitchFamily="34" charset="0"/>
               </a:rPr>
               <a:t>A </a:t>
             </a:r>
@@ -8172,7 +8292,7 @@
                 <a:solidFill>
                   <a:schemeClr val="tx1"/>
                 </a:solidFill>
-                <a:latin typeface="Algerian" panose="04020705040A02060702" pitchFamily="82" charset="0"/>
+                <a:latin typeface="Berlin Sans FB Demi" panose="020E0802020502020306" pitchFamily="34" charset="0"/>
               </a:rPr>
               <a:t>Conversão de São </a:t>
             </a:r>
@@ -8181,7 +8301,7 @@
                 <a:solidFill>
                   <a:schemeClr val="tx1"/>
                 </a:solidFill>
-                <a:latin typeface="Algerian" panose="04020705040A02060702" pitchFamily="82" charset="0"/>
+                <a:latin typeface="Berlin Sans FB Demi" panose="020E0802020502020306" pitchFamily="34" charset="0"/>
               </a:rPr>
               <a:t>Paulo</a:t>
             </a:r>
@@ -8190,7 +8310,7 @@
                 <a:solidFill>
                   <a:schemeClr val="tx1"/>
                 </a:solidFill>
-                <a:latin typeface="Algerian" panose="04020705040A02060702" pitchFamily="82" charset="0"/>
+                <a:latin typeface="Berlin Sans FB Demi" panose="020E0802020502020306" pitchFamily="34" charset="0"/>
               </a:rPr>
               <a:t> .</a:t>
             </a:r>
@@ -8198,7 +8318,7 @@
               <a:solidFill>
                 <a:schemeClr val="tx1"/>
               </a:solidFill>
-              <a:latin typeface="Algerian" panose="04020705040A02060702" pitchFamily="82" charset="0"/>
+              <a:latin typeface="Berlin Sans FB Demi" panose="020E0802020502020306" pitchFamily="34" charset="0"/>
             </a:endParaRPr>
           </a:p>
           <a:p>
@@ -8207,7 +8327,7 @@
                 <a:solidFill>
                   <a:schemeClr val="tx1"/>
                 </a:solidFill>
-                <a:latin typeface="Algerian" panose="04020705040A02060702" pitchFamily="82" charset="0"/>
+                <a:latin typeface="Berlin Sans FB Demi" panose="020E0802020502020306" pitchFamily="34" charset="0"/>
               </a:rPr>
               <a:t> </a:t>
             </a:r>
@@ -8216,7 +8336,7 @@
                 <a:solidFill>
                   <a:schemeClr val="tx1"/>
                 </a:solidFill>
-                <a:latin typeface="Algerian" panose="04020705040A02060702" pitchFamily="82" charset="0"/>
+                <a:latin typeface="Berlin Sans FB Demi" panose="020E0802020502020306" pitchFamily="34" charset="0"/>
               </a:rPr>
               <a:t>A Vocação de São Mateus</a:t>
             </a:r>
@@ -8225,7 +8345,7 @@
                 <a:solidFill>
                   <a:schemeClr val="tx1"/>
                 </a:solidFill>
-                <a:latin typeface="Algerian" panose="04020705040A02060702" pitchFamily="82" charset="0"/>
+                <a:latin typeface="Berlin Sans FB Demi" panose="020E0802020502020306" pitchFamily="34" charset="0"/>
               </a:rPr>
               <a:t> (1599-1600) mostra o momento em </a:t>
             </a:r>
@@ -8234,7 +8354,7 @@
                 <a:solidFill>
                   <a:schemeClr val="tx1"/>
                 </a:solidFill>
-                <a:latin typeface="Algerian" panose="04020705040A02060702" pitchFamily="82" charset="0"/>
+                <a:latin typeface="Berlin Sans FB Demi" panose="020E0802020502020306" pitchFamily="34" charset="0"/>
               </a:rPr>
               <a:t>           que           Jesus </a:t>
             </a:r>
@@ -8243,7 +8363,7 @@
                 <a:solidFill>
                   <a:schemeClr val="tx1"/>
                 </a:solidFill>
-                <a:latin typeface="Algerian" panose="04020705040A02060702" pitchFamily="82" charset="0"/>
+                <a:latin typeface="Berlin Sans FB Demi" panose="020E0802020502020306" pitchFamily="34" charset="0"/>
               </a:rPr>
               <a:t>convida Mateus, um cobrador de impostos, para ser seu discípulo [1]. A obra destaca-se por um feixe de luz diagonal marcante [1]. Essa luz rasga a </a:t>
             </a:r>
@@ -8252,7 +8372,7 @@
                 <a:solidFill>
                   <a:schemeClr val="tx1"/>
                 </a:solidFill>
-                <a:latin typeface="Algerian" panose="04020705040A02060702" pitchFamily="82" charset="0"/>
+                <a:latin typeface="Berlin Sans FB Demi" panose="020E0802020502020306" pitchFamily="34" charset="0"/>
               </a:rPr>
               <a:t> escuridão </a:t>
             </a:r>
@@ -8261,7 +8381,7 @@
                 <a:solidFill>
                   <a:schemeClr val="tx1"/>
                 </a:solidFill>
-                <a:latin typeface="Algerian" panose="04020705040A02060702" pitchFamily="82" charset="0"/>
+                <a:latin typeface="Berlin Sans FB Demi" panose="020E0802020502020306" pitchFamily="34" charset="0"/>
               </a:rPr>
               <a:t>e direciona o olhar do espectador direto para o rosto de </a:t>
             </a:r>
@@ -8270,7 +8390,7 @@
                 <a:solidFill>
                   <a:schemeClr val="tx1"/>
                 </a:solidFill>
-                <a:latin typeface="Algerian" panose="04020705040A02060702" pitchFamily="82" charset="0"/>
+                <a:latin typeface="Berlin Sans FB Demi" panose="020E0802020502020306" pitchFamily="34" charset="0"/>
               </a:rPr>
               <a:t>Mateus.</a:t>
             </a:r>
@@ -8363,7 +8483,7 @@
         </p:blipFill>
         <p:spPr>
           <a:xfrm>
-            <a:off x="117288" y="1533690"/>
+            <a:off x="116777" y="1406408"/>
             <a:ext cx="2576602" cy="2431599"/>
           </a:xfrm>
           <a:prstGeom prst="rect">
@@ -8381,8 +8501,8 @@
         </p:nvSpPr>
         <p:spPr bwMode="auto">
           <a:xfrm>
-            <a:off x="397295" y="4324696"/>
-            <a:ext cx="6924268" cy="4185761"/>
+            <a:off x="2692867" y="4374264"/>
+            <a:ext cx="6924268" cy="3908762"/>
           </a:xfrm>
           <a:prstGeom prst="rect">
             <a:avLst/>
@@ -8442,8 +8562,6 @@
               </a:spcAft>
               <a:buClrTx/>
               <a:buSzTx/>
-              <a:buFontTx/>
-              <a:buChar char="•"/>
               <a:tabLst/>
             </a:pPr>
             <a:r>
@@ -8457,7 +8575,20 @@
                 <a:effectLst/>
                 <a:latin typeface="Algerian" panose="04020705040A02060702" pitchFamily="82" charset="0"/>
               </a:rPr>
-              <a:t>  Aleijadinho / Antônio Francisco Lisboa (Minas  Gerais)</a:t>
+              <a:t>  </a:t>
+            </a:r>
+            <a:r>
+              <a:rPr kumimoji="0" lang="pt-BR" altLang="pt-BR" b="1" i="0" u="none" strike="noStrike" cap="none" normalizeH="0" baseline="0" dirty="0" smtClean="0">
+                <a:ln>
+                  <a:noFill/>
+                </a:ln>
+                <a:solidFill>
+                  <a:schemeClr val="tx1"/>
+                </a:solidFill>
+                <a:effectLst/>
+                <a:latin typeface="Berlin Sans FB Demi" panose="020E0802020502020306" pitchFamily="34" charset="0"/>
+              </a:rPr>
+              <a:t>Aleijadinho / Antônio Francisco Lisboa (Minas  Gerais)</a:t>
             </a:r>
             <a:r>
               <a:rPr kumimoji="0" lang="pt-BR" altLang="pt-BR" b="0" i="0" u="none" strike="noStrike" cap="none" normalizeH="0" baseline="0" dirty="0" smtClean="0">
@@ -8468,9 +8599,77 @@
                   <a:schemeClr val="tx1"/>
                 </a:solidFill>
                 <a:effectLst/>
-                <a:latin typeface="Algerian" panose="04020705040A02060702" pitchFamily="82" charset="0"/>
+                <a:latin typeface="Berlin Sans FB Demi" panose="020E0802020502020306" pitchFamily="34" charset="0"/>
               </a:rPr>
               <a:t>: Escultor e arquiteto, considerado o ápice do Barroco-Rococó brasileiro.</a:t>
+            </a:r>
+          </a:p>
+          <a:p>
+            <a:pPr marR="0" lvl="0" algn="l" defTabSz="914400" rtl="0" eaLnBrk="0" fontAlgn="base" latinLnBrk="0" hangingPunct="0">
+              <a:lnSpc>
+                <a:spcPct val="100000"/>
+              </a:lnSpc>
+              <a:spcBef>
+                <a:spcPct val="0"/>
+              </a:spcBef>
+              <a:spcAft>
+                <a:spcPct val="0"/>
+              </a:spcAft>
+              <a:buClrTx/>
+              <a:buSzTx/>
+              <a:tabLst/>
+            </a:pPr>
+            <a:endParaRPr kumimoji="0" lang="pt-BR" altLang="pt-BR" b="0" i="0" u="none" strike="noStrike" cap="none" normalizeH="0" baseline="0" dirty="0" smtClean="0">
+              <a:ln>
+                <a:noFill/>
+              </a:ln>
+              <a:solidFill>
+                <a:schemeClr val="tx1"/>
+              </a:solidFill>
+              <a:effectLst/>
+              <a:latin typeface="Berlin Sans FB Demi" panose="020E0802020502020306" pitchFamily="34" charset="0"/>
+            </a:endParaRPr>
+          </a:p>
+          <a:p>
+            <a:pPr marL="0" marR="0" lvl="0" indent="0" algn="l" defTabSz="914400" rtl="0" eaLnBrk="0" fontAlgn="base" latinLnBrk="0" hangingPunct="0">
+              <a:lnSpc>
+                <a:spcPct val="100000"/>
+              </a:lnSpc>
+              <a:spcBef>
+                <a:spcPct val="0"/>
+              </a:spcBef>
+              <a:spcAft>
+                <a:spcPct val="0"/>
+              </a:spcAft>
+              <a:buClrTx/>
+              <a:buSzTx/>
+              <a:tabLst/>
+            </a:pPr>
+            <a:r>
+              <a:rPr kumimoji="0" lang="pt-BR" altLang="pt-BR" b="0" i="1" u="none" strike="noStrike" cap="none" normalizeH="0" baseline="0" dirty="0" smtClean="0">
+                <a:ln>
+                  <a:noFill/>
+                </a:ln>
+                <a:solidFill>
+                  <a:schemeClr val="tx1"/>
+                </a:solidFill>
+                <a:effectLst/>
+                <a:latin typeface="Berlin Sans FB Demi" panose="020E0802020502020306" pitchFamily="34" charset="0"/>
+              </a:rPr>
+              <a:t>Os Doze Profetas</a:t>
+            </a:r>
+            <a:r>
+              <a:rPr kumimoji="0" lang="pt-BR" altLang="pt-BR" b="0" i="0" u="none" strike="noStrike" cap="none" normalizeH="0" baseline="0" dirty="0" smtClean="0">
+                <a:ln>
+                  <a:noFill/>
+                </a:ln>
+                <a:solidFill>
+                  <a:schemeClr val="tx1"/>
+                </a:solidFill>
+                <a:effectLst/>
+                <a:latin typeface="Berlin Sans FB Demi" panose="020E0802020502020306" pitchFamily="34" charset="0"/>
+              </a:rPr>
+              <a:t> (em pedra-sabão, em Congonhas)</a:t>
             </a:r>
           </a:p>
           <a:p>
@@ -8496,52 +8695,76 @@
                 <a:schemeClr val="tx1"/>
               </a:solidFill>
               <a:effectLst/>
-              <a:latin typeface="Algerian" panose="04020705040A02060702" pitchFamily="82" charset="0"/>
+              <a:latin typeface="Berlin Sans FB Demi" panose="020E0802020502020306" pitchFamily="34" charset="0"/>
             </a:endParaRPr>
           </a:p>
           <a:p>
-            <a:pPr marL="0" marR="0" lvl="0" indent="0" algn="l" defTabSz="914400" rtl="0" eaLnBrk="0" fontAlgn="base" latinLnBrk="0" hangingPunct="0">
-              <a:lnSpc>
-                <a:spcPct val="100000"/>
-              </a:lnSpc>
+            <a:pPr lvl="0" defTabSz="914400" eaLnBrk="0" fontAlgn="base" hangingPunct="0">
               <a:spcBef>
                 <a:spcPct val="0"/>
               </a:spcBef>
               <a:spcAft>
                 <a:spcPct val="0"/>
               </a:spcAft>
-              <a:buClrTx/>
-              <a:buSzTx/>
-              <a:buFontTx/>
-              <a:buChar char="•"/>
-              <a:tabLst/>
             </a:pPr>
             <a:r>
-              <a:rPr kumimoji="0" lang="pt-BR" altLang="pt-BR" b="0" i="1" u="none" strike="noStrike" cap="none" normalizeH="0" baseline="0" dirty="0" smtClean="0">
-                <a:ln>
-                  <a:noFill/>
-                </a:ln>
-                <a:solidFill>
-                  <a:schemeClr val="tx1"/>
-                </a:solidFill>
-                <a:effectLst/>
-                <a:latin typeface="Algerian" panose="04020705040A02060702" pitchFamily="82" charset="0"/>
+              <a:rPr lang="pt-BR" i="1" dirty="0" smtClean="0">
+                <a:latin typeface="Berlin Sans FB Demi" panose="020E0802020502020306" pitchFamily="34" charset="0"/>
               </a:rPr>
-              <a:t>Os Doze Profetas</a:t>
-            </a:r>
-            <a:r>
-              <a:rPr kumimoji="0" lang="pt-BR" altLang="pt-BR" b="0" i="0" u="none" strike="noStrike" cap="none" normalizeH="0" baseline="0" dirty="0" smtClean="0">
-                <a:ln>
-                  <a:noFill/>
-                </a:ln>
-                <a:solidFill>
-                  <a:schemeClr val="tx1"/>
-                </a:solidFill>
-                <a:effectLst/>
-                <a:latin typeface="Algerian" panose="04020705040A02060702" pitchFamily="82" charset="0"/>
+              <a:t>  Os </a:t>
+            </a:r>
+            <a:r>
+              <a:rPr lang="pt-BR" i="1" dirty="0">
+                <a:latin typeface="Berlin Sans FB Demi" panose="020E0802020502020306" pitchFamily="34" charset="0"/>
               </a:rPr>
-              <a:t> (em pedra-sabão, em Congonhas)</a:t>
-            </a:r>
+              <a:t>Doze Profetas</a:t>
+            </a:r>
+            <a:r>
+              <a:rPr lang="pt-BR" dirty="0">
+                <a:latin typeface="Berlin Sans FB Demi" panose="020E0802020502020306" pitchFamily="34" charset="0"/>
+              </a:rPr>
+              <a:t> é um conjunto de </a:t>
+            </a:r>
+            <a:r>
+              <a:rPr lang="pt-BR" b="1" dirty="0">
+                <a:latin typeface="Berlin Sans FB Demi" panose="020E0802020502020306" pitchFamily="34" charset="0"/>
+              </a:rPr>
+              <a:t>12 esculturas em </a:t>
+            </a:r>
+            <a:r>
+              <a:rPr lang="pt-BR" b="1" dirty="0" smtClean="0">
+                <a:latin typeface="Berlin Sans FB Demi" panose="020E0802020502020306" pitchFamily="34" charset="0"/>
+              </a:rPr>
+              <a:t>  tamanho </a:t>
+            </a:r>
+            <a:r>
+              <a:rPr lang="pt-BR" b="1" dirty="0">
+                <a:latin typeface="Berlin Sans FB Demi" panose="020E0802020502020306" pitchFamily="34" charset="0"/>
+              </a:rPr>
+              <a:t>real</a:t>
+            </a:r>
+            <a:r>
+              <a:rPr lang="pt-BR" dirty="0">
+                <a:latin typeface="Berlin Sans FB Demi" panose="020E0802020502020306" pitchFamily="34" charset="0"/>
+              </a:rPr>
+              <a:t> feitas em pedra-sabão por </a:t>
+            </a:r>
+            <a:r>
+              <a:rPr lang="pt-BR" dirty="0" smtClean="0">
+                <a:latin typeface="Berlin Sans FB Demi" panose="020E0802020502020306" pitchFamily="34" charset="0"/>
+              </a:rPr>
+              <a:t>Aleijadinho.</a:t>
+            </a:r>
+            <a:endParaRPr kumimoji="0" lang="pt-BR" altLang="pt-BR" b="0" i="0" u="none" strike="noStrike" cap="none" normalizeH="0" baseline="0" dirty="0" smtClean="0">
+              <a:ln>
+                <a:noFill/>
+              </a:ln>
+              <a:solidFill>
+                <a:schemeClr val="tx1"/>
+              </a:solidFill>
+              <a:effectLst/>
+              <a:latin typeface="Berlin Sans FB Demi" panose="020E0802020502020306" pitchFamily="34" charset="0"/>
+            </a:endParaRPr>
           </a:p>
           <a:p>
             <a:pPr marL="0" marR="0" lvl="0" indent="0" algn="l" defTabSz="914400" rtl="0" eaLnBrk="0" fontAlgn="base" latinLnBrk="0" hangingPunct="0">
@@ -8568,103 +8791,7 @@
                 <a:schemeClr val="tx1"/>
               </a:solidFill>
               <a:effectLst/>
-              <a:latin typeface="Algerian" panose="04020705040A02060702" pitchFamily="82" charset="0"/>
-            </a:endParaRPr>
-          </a:p>
-          <a:p>
-            <a:pPr lvl="0" defTabSz="914400" eaLnBrk="0" fontAlgn="base" hangingPunct="0">
-              <a:spcBef>
-                <a:spcPct val="0"/>
-              </a:spcBef>
-              <a:spcAft>
-                <a:spcPct val="0"/>
-              </a:spcAft>
-            </a:pPr>
-            <a:r>
-              <a:rPr lang="pt-BR" i="1" dirty="0" smtClean="0">
-                <a:latin typeface="Algerian" panose="04020705040A02060702" pitchFamily="82" charset="0"/>
-              </a:rPr>
-              <a:t>  Os </a:t>
-            </a:r>
-            <a:r>
-              <a:rPr lang="pt-BR" i="1" dirty="0">
-                <a:latin typeface="Algerian" panose="04020705040A02060702" pitchFamily="82" charset="0"/>
-              </a:rPr>
-              <a:t>Doze Profetas</a:t>
-            </a:r>
-            <a:r>
-              <a:rPr lang="pt-BR" dirty="0">
-                <a:latin typeface="Algerian" panose="04020705040A02060702" pitchFamily="82" charset="0"/>
-              </a:rPr>
-              <a:t> é um conjunto de </a:t>
-            </a:r>
-            <a:r>
-              <a:rPr lang="pt-BR" b="1" dirty="0">
-                <a:latin typeface="Algerian" panose="04020705040A02060702" pitchFamily="82" charset="0"/>
-              </a:rPr>
-              <a:t>12 esculturas em </a:t>
-            </a:r>
-            <a:r>
-              <a:rPr lang="pt-BR" b="1" dirty="0" smtClean="0">
-                <a:latin typeface="Algerian" panose="04020705040A02060702" pitchFamily="82" charset="0"/>
-              </a:rPr>
-              <a:t>  tamanho </a:t>
-            </a:r>
-            <a:r>
-              <a:rPr lang="pt-BR" b="1" dirty="0">
-                <a:latin typeface="Algerian" panose="04020705040A02060702" pitchFamily="82" charset="0"/>
-              </a:rPr>
-              <a:t>real</a:t>
-            </a:r>
-            <a:r>
-              <a:rPr lang="pt-BR" dirty="0">
-                <a:latin typeface="Algerian" panose="04020705040A02060702" pitchFamily="82" charset="0"/>
-              </a:rPr>
-              <a:t> feitas em pedra-sabão por </a:t>
-            </a:r>
-            <a:r>
-              <a:rPr lang="pt-BR" dirty="0" smtClean="0">
-                <a:latin typeface="Algerian" panose="04020705040A02060702" pitchFamily="82" charset="0"/>
-              </a:rPr>
-              <a:t>Aleijadinho.</a:t>
-            </a:r>
-            <a:endParaRPr kumimoji="0" lang="pt-BR" altLang="pt-BR" b="0" i="0" u="none" strike="noStrike" cap="none" normalizeH="0" baseline="0" dirty="0" smtClean="0">
-              <a:ln>
-                <a:noFill/>
-              </a:ln>
-              <a:solidFill>
-                <a:schemeClr val="tx1"/>
-              </a:solidFill>
-              <a:effectLst/>
-              <a:latin typeface="Algerian" panose="04020705040A02060702" pitchFamily="82" charset="0"/>
-            </a:endParaRPr>
-          </a:p>
-          <a:p>
-            <a:pPr marL="0" marR="0" lvl="0" indent="0" algn="l" defTabSz="914400" rtl="0" eaLnBrk="0" fontAlgn="base" latinLnBrk="0" hangingPunct="0">
-              <a:lnSpc>
-                <a:spcPct val="100000"/>
-              </a:lnSpc>
-              <a:spcBef>
-                <a:spcPct val="0"/>
-              </a:spcBef>
-              <a:spcAft>
-                <a:spcPct val="0"/>
-              </a:spcAft>
-              <a:buClrTx/>
-              <a:buSzTx/>
-              <a:buFontTx/>
-              <a:buChar char="•"/>
-              <a:tabLst/>
-            </a:pPr>
-            <a:endParaRPr kumimoji="0" lang="pt-BR" altLang="pt-BR" b="0" i="0" u="none" strike="noStrike" cap="none" normalizeH="0" baseline="0" dirty="0" smtClean="0">
-              <a:ln>
-                <a:noFill/>
-              </a:ln>
-              <a:solidFill>
-                <a:schemeClr val="tx1"/>
-              </a:solidFill>
-              <a:effectLst/>
-              <a:latin typeface="Algerian" panose="04020705040A02060702" pitchFamily="82" charset="0"/>
+              <a:latin typeface="Berlin Sans FB Demi" panose="020E0802020502020306" pitchFamily="34" charset="0"/>
             </a:endParaRPr>
           </a:p>
           <a:p>
@@ -8690,7 +8817,7 @@
                 <a:schemeClr val="tx1"/>
               </a:solidFill>
               <a:effectLst/>
-              <a:latin typeface="Algerian" panose="04020705040A02060702" pitchFamily="82" charset="0"/>
+              <a:latin typeface="Berlin Sans FB Demi" panose="020E0802020502020306" pitchFamily="34" charset="0"/>
             </a:endParaRPr>
           </a:p>
           <a:p>
@@ -8718,7 +8845,7 @@
                 <a:schemeClr val="tx1"/>
               </a:solidFill>
               <a:effectLst/>
-              <a:latin typeface="Arial" panose="020B0604020202020204" pitchFamily="34" charset="0"/>
+              <a:latin typeface="Berlin Sans FB Demi" panose="020E0802020502020306" pitchFamily="34" charset="0"/>
             </a:endParaRPr>
           </a:p>
           <a:p>
@@ -8846,14 +8973,44 @@
         </p:blipFill>
         <p:spPr>
           <a:xfrm>
-            <a:off x="7321563" y="4159549"/>
-            <a:ext cx="2778781" cy="2698451"/>
+            <a:off x="117288" y="4147364"/>
+            <a:ext cx="2575579" cy="2501123"/>
           </a:xfrm>
           <a:prstGeom prst="rect">
             <a:avLst/>
           </a:prstGeom>
         </p:spPr>
       </p:pic>
+      <p:cxnSp>
+        <p:nvCxnSpPr>
+          <p:cNvPr id="10" name="Conector reto 9"/>
+          <p:cNvCxnSpPr/>
+          <p:nvPr/>
+        </p:nvCxnSpPr>
+        <p:spPr>
+          <a:xfrm>
+            <a:off x="0" y="3994304"/>
+            <a:ext cx="10100344" cy="0"/>
+          </a:xfrm>
+          <a:prstGeom prst="line">
+            <a:avLst/>
+          </a:prstGeom>
+        </p:spPr>
+        <p:style>
+          <a:lnRef idx="1">
+            <a:schemeClr val="accent1"/>
+          </a:lnRef>
+          <a:fillRef idx="0">
+            <a:schemeClr val="accent1"/>
+          </a:fillRef>
+          <a:effectRef idx="0">
+            <a:schemeClr val="accent1"/>
+          </a:effectRef>
+          <a:fontRef idx="minor">
+            <a:schemeClr val="tx1"/>
+          </a:fontRef>
+        </p:style>
+      </p:cxnSp>
     </p:spTree>
     <p:extLst>
       <p:ext uri="{BB962C8B-B14F-4D97-AF65-F5344CB8AC3E}">
@@ -8917,171 +9074,93 @@
           <a:lstStyle/>
           <a:p>
             <a:r>
-              <a:rPr lang="pt-BR" sz="4800" b="1" dirty="0" smtClean="0">
+              <a:rPr lang="pt-BR" sz="5400" b="1" dirty="0" smtClean="0">
+                <a:latin typeface="Berlin Sans FB Demi" panose="020E0802020502020306" pitchFamily="34" charset="0"/>
+              </a:rPr>
+              <a:t>Caracteristicas Principais</a:t>
+            </a:r>
+            <a:endParaRPr lang="pt-BR" sz="5400" b="1" dirty="0">
+              <a:latin typeface="Berlin Sans FB Demi" panose="020E0802020502020306" pitchFamily="34" charset="0"/>
+            </a:endParaRPr>
+          </a:p>
+        </p:txBody>
+      </p:sp>
+      <p:sp>
+        <p:nvSpPr>
+          <p:cNvPr id="3" name="Espaço Reservado para Texto 2"/>
+          <p:cNvSpPr>
+            <a:spLocks noGrp="1"/>
+          </p:cNvSpPr>
+          <p:nvPr>
+            <p:ph type="body" idx="1"/>
+          </p:nvPr>
+        </p:nvSpPr>
+        <p:spPr>
+          <a:xfrm>
+            <a:off x="375331" y="1872343"/>
+            <a:ext cx="8898672" cy="4169019"/>
+          </a:xfrm>
+        </p:spPr>
+        <p:txBody>
+          <a:bodyPr/>
+          <a:lstStyle/>
+          <a:p>
+            <a:r>
+              <a:rPr lang="pt-BR" sz="2000" dirty="0" smtClean="0">
+                <a:solidFill>
+                  <a:schemeClr val="tx1"/>
+                </a:solidFill>
                 <a:latin typeface="Algerian" panose="04020705040A02060702" pitchFamily="82" charset="0"/>
               </a:rPr>
-              <a:t>Caracteristicas Principais</a:t>
-            </a:r>
-            <a:endParaRPr lang="pt-BR" sz="4800" b="1" dirty="0">
-              <a:latin typeface="Algerian" panose="04020705040A02060702" pitchFamily="82" charset="0"/>
-            </a:endParaRPr>
-          </a:p>
-        </p:txBody>
-      </p:sp>
-      <p:sp>
-        <p:nvSpPr>
-          <p:cNvPr id="3" name="Espaço Reservado para Texto 2"/>
-          <p:cNvSpPr>
-            <a:spLocks noGrp="1"/>
-          </p:cNvSpPr>
-          <p:nvPr>
-            <p:ph type="body" idx="1"/>
-          </p:nvPr>
-        </p:nvSpPr>
-        <p:spPr>
-          <a:xfrm>
-            <a:off x="677335" y="2835479"/>
-            <a:ext cx="8596668" cy="3205883"/>
-          </a:xfrm>
-        </p:spPr>
-        <p:txBody>
-          <a:bodyPr/>
-          <a:lstStyle/>
-          <a:p>
-            <a:r>
-              <a:rPr lang="pt-BR" dirty="0" smtClean="0">
+              <a:t>   </a:t>
+            </a:r>
+            <a:r>
+              <a:rPr lang="pt-BR" sz="2000" dirty="0" smtClean="0">
                 <a:solidFill>
                   <a:schemeClr val="tx1"/>
                 </a:solidFill>
-                <a:latin typeface="Algerian" panose="04020705040A02060702" pitchFamily="82" charset="0"/>
+                <a:latin typeface="Berlin Sans FB Demi" panose="020E0802020502020306" pitchFamily="34" charset="0"/>
               </a:rPr>
-              <a:t>   O </a:t>
-            </a:r>
-            <a:r>
-              <a:rPr lang="pt-BR" dirty="0">
+              <a:t>O </a:t>
+            </a:r>
+            <a:r>
+              <a:rPr lang="pt-BR" sz="2000" dirty="0">
                 <a:solidFill>
                   <a:schemeClr val="tx1"/>
                 </a:solidFill>
-                <a:latin typeface="Algerian" panose="04020705040A02060702" pitchFamily="82" charset="0"/>
+                <a:latin typeface="Berlin Sans FB Demi" panose="020E0802020502020306" pitchFamily="34" charset="0"/>
               </a:rPr>
               <a:t>Barroco é a arte do conflito</a:t>
             </a:r>
             <a:r>
-              <a:rPr lang="pt-BR" dirty="0" smtClean="0">
+              <a:rPr lang="pt-BR" sz="2000" dirty="0" smtClean="0">
                 <a:solidFill>
                   <a:schemeClr val="tx1"/>
                 </a:solidFill>
-                <a:latin typeface="Algerian" panose="04020705040A02060702" pitchFamily="82" charset="0"/>
+                <a:latin typeface="Berlin Sans FB Demi" panose="020E0802020502020306" pitchFamily="34" charset="0"/>
               </a:rPr>
               <a:t>.  </a:t>
             </a:r>
             <a:r>
-              <a:rPr lang="pt-BR" dirty="0">
+              <a:rPr lang="pt-BR" sz="2000" dirty="0">
                 <a:solidFill>
                   <a:schemeClr val="tx1"/>
                 </a:solidFill>
-                <a:latin typeface="Algerian" panose="04020705040A02060702" pitchFamily="82" charset="0"/>
+                <a:latin typeface="Berlin Sans FB Demi" panose="020E0802020502020306" pitchFamily="34" charset="0"/>
               </a:rPr>
-              <a:t>Suas principais características são o </a:t>
-            </a:r>
-            <a:r>
-              <a:rPr lang="pt-BR" b="1" dirty="0">
+              <a:t>Suas principais características são o contraste entre luz e sombra (claro-escuro) e o forte drama emocional.</a:t>
+            </a:r>
+          </a:p>
+          <a:p>
+            <a:r>
+              <a:rPr lang="pt-BR" sz="2000" dirty="0">
                 <a:solidFill>
                   <a:schemeClr val="tx1"/>
                 </a:solidFill>
-                <a:latin typeface="Algerian" panose="04020705040A02060702" pitchFamily="82" charset="0"/>
+                <a:latin typeface="Berlin Sans FB Demi" panose="020E0802020502020306" pitchFamily="34" charset="0"/>
               </a:rPr>
-              <a:t>contraste entre luz e sombra</a:t>
-            </a:r>
-            <a:r>
-              <a:rPr lang="pt-BR" dirty="0">
-                <a:solidFill>
-                  <a:schemeClr val="tx1"/>
-                </a:solidFill>
-                <a:latin typeface="Algerian" panose="04020705040A02060702" pitchFamily="82" charset="0"/>
-              </a:rPr>
-              <a:t> (claro-escuro) e o </a:t>
-            </a:r>
-            <a:r>
-              <a:rPr lang="pt-BR" b="1" dirty="0">
-                <a:solidFill>
-                  <a:schemeClr val="tx1"/>
-                </a:solidFill>
-                <a:latin typeface="Algerian" panose="04020705040A02060702" pitchFamily="82" charset="0"/>
-              </a:rPr>
-              <a:t>forte drama emocional</a:t>
-            </a:r>
-            <a:r>
-              <a:rPr lang="pt-BR" dirty="0">
-                <a:solidFill>
-                  <a:schemeClr val="tx1"/>
-                </a:solidFill>
-                <a:latin typeface="Algerian" panose="04020705040A02060702" pitchFamily="82" charset="0"/>
-              </a:rPr>
-              <a:t>.</a:t>
-            </a:r>
-          </a:p>
-          <a:p>
-            <a:r>
-              <a:rPr lang="pt-BR" dirty="0">
-                <a:solidFill>
-                  <a:schemeClr val="tx1"/>
-                </a:solidFill>
-                <a:latin typeface="Algerian" panose="04020705040A02060702" pitchFamily="82" charset="0"/>
-              </a:rPr>
-              <a:t>O estilo rejeita a simetria para focar no </a:t>
-            </a:r>
-            <a:r>
-              <a:rPr lang="pt-BR" b="1" dirty="0">
-                <a:solidFill>
-                  <a:schemeClr val="tx1"/>
-                </a:solidFill>
-                <a:latin typeface="Algerian" panose="04020705040A02060702" pitchFamily="82" charset="0"/>
-              </a:rPr>
-              <a:t>movimento e linhas curvas</a:t>
-            </a:r>
-            <a:r>
-              <a:rPr lang="pt-BR" dirty="0">
-                <a:solidFill>
-                  <a:schemeClr val="tx1"/>
-                </a:solidFill>
-                <a:latin typeface="Algerian" panose="04020705040A02060702" pitchFamily="82" charset="0"/>
-              </a:rPr>
-              <a:t>, criando cenas teatrais e realistas que expressam a </a:t>
-            </a:r>
-            <a:r>
-              <a:rPr lang="pt-BR" b="1" dirty="0">
-                <a:solidFill>
-                  <a:schemeClr val="tx1"/>
-                </a:solidFill>
-                <a:latin typeface="Algerian" panose="04020705040A02060702" pitchFamily="82" charset="0"/>
-              </a:rPr>
-              <a:t>tensão entre o sagrado e o pecado</a:t>
-            </a:r>
-            <a:r>
-              <a:rPr lang="pt-BR" dirty="0">
-                <a:solidFill>
-                  <a:schemeClr val="tx1"/>
-                </a:solidFill>
-                <a:latin typeface="Algerian" panose="04020705040A02060702" pitchFamily="82" charset="0"/>
-              </a:rPr>
-              <a:t>. Na literatura, destaca-se pelo uso de </a:t>
-            </a:r>
-            <a:r>
-              <a:rPr lang="pt-BR" b="1" dirty="0">
-                <a:solidFill>
-                  <a:schemeClr val="tx1"/>
-                </a:solidFill>
-                <a:latin typeface="Algerian" panose="04020705040A02060702" pitchFamily="82" charset="0"/>
-              </a:rPr>
-              <a:t>metáforas complexas e linguagem rebuscada</a:t>
-            </a:r>
-            <a:endParaRPr lang="pt-BR" dirty="0">
-              <a:solidFill>
-                <a:schemeClr val="tx1"/>
-              </a:solidFill>
-              <a:latin typeface="Algerian" panose="04020705040A02060702" pitchFamily="82" charset="0"/>
-            </a:endParaRPr>
+              <a:t>O estilo rejeita a simetria para focar no movimento e linhas curvas, criando cenas teatrais e realistas que expressam a tensão entre o sagrado e o pecado. Na literatura, destaca-se pelo uso de metáforas complexas e linguagem rebuscada</a:t>
+            </a:r>
           </a:p>
           <a:p>
             <a:endParaRPr lang="pt-BR" dirty="0"/>
